--- a/Tripolr_CCMF_Pitch_Deck.pptx
+++ b/Tripolr_CCMF_Pitch_Deck.pptx
@@ -5,7 +5,7 @@
     <p:sldMasterId id="2147483648" r:id="rId1"/>
   </p:sldMasterIdLst>
   <p:notesMasterIdLst>
-    <p:notesMasterId r:id="rId16"/>
+    <p:notesMasterId r:id="rId17"/>
   </p:notesMasterIdLst>
   <p:sldIdLst>
     <p:sldId id="269" r:id="rId2"/>
@@ -19,9 +19,10 @@
     <p:sldId id="263" r:id="rId10"/>
     <p:sldId id="264" r:id="rId11"/>
     <p:sldId id="265" r:id="rId12"/>
-    <p:sldId id="266" r:id="rId13"/>
-    <p:sldId id="267" r:id="rId14"/>
-    <p:sldId id="268" r:id="rId15"/>
+    <p:sldId id="271" r:id="rId13"/>
+    <p:sldId id="266" r:id="rId14"/>
+    <p:sldId id="267" r:id="rId15"/>
+    <p:sldId id="268" r:id="rId16"/>
   </p:sldIdLst>
   <p:sldSz cx="12192000" cy="6858000"/>
   <p:notesSz cx="6858000" cy="12192000"/>
@@ -206,7 +207,7 @@
           </a:lstStyle>
           <a:p>
             <a:fld id="{9EC1BE48-3131-41D9-977A-DDB19CE181F1}" type="datetimeFigureOut">
-              <a:t>7/22/2026</a:t>
+              <a:t>7/26/2026</a:t>
             </a:fld>
             <a:endParaRPr lang="en-US"/>
           </a:p>
@@ -722,7 +723,7 @@
           <a:p>
             <a:fld id="{F7021451-1387-4CA6-816F-3879F97B5CBC}" type="slidenum">
               <a:rPr lang="en-US"/>
-              <a:t>12</a:t>
+              <a:t>13</a:t>
             </a:fld>
             <a:endParaRPr lang="en-US"/>
           </a:p>
@@ -811,7 +812,7 @@
           <a:p>
             <a:fld id="{F7021451-1387-4CA6-816F-3879F97B5CBC}" type="slidenum">
               <a:rPr lang="en-US"/>
-              <a:t>13</a:t>
+              <a:t>14</a:t>
             </a:fld>
             <a:endParaRPr lang="en-US"/>
           </a:p>
@@ -901,7 +902,7 @@
           <a:p>
             <a:fld id="{F7021451-1387-4CA6-816F-3879F97B5CBC}" type="slidenum">
               <a:rPr lang="en-US"/>
-              <a:t>14</a:t>
+              <a:t>15</a:t>
             </a:fld>
             <a:endParaRPr lang="en-US"/>
           </a:p>
@@ -1817,7 +1818,7 @@
           </a:prstGeom>
           <a:extLst>
             <a:ext uri="{C572A759-6A51-4108-AA02-DFA0A04FC94B}">
-              <ma14:wrappingTextBoxFlag xmlns="" xmlns:ma14="http://schemas.microsoft.com/office/mac/drawingml/2011/main" val="0"/>
+              <ma14:wrappingTextBoxFlag xmlns:ma14="http://schemas.microsoft.com/office/mac/drawingml/2011/main" xmlns="" val="0"/>
             </a:ext>
           </a:extLst>
         </p:spPr>
@@ -1895,7 +1896,7 @@
           </a:prstGeom>
           <a:extLst>
             <a:ext uri="{C572A759-6A51-4108-AA02-DFA0A04FC94B}">
-              <ma14:wrappingTextBoxFlag xmlns="" xmlns:ma14="http://schemas.microsoft.com/office/mac/drawingml/2011/main" val="0"/>
+              <ma14:wrappingTextBoxFlag xmlns:ma14="http://schemas.microsoft.com/office/mac/drawingml/2011/main" xmlns="" val="0"/>
             </a:ext>
           </a:extLst>
         </p:spPr>
@@ -2649,6 +2650,13 @@
             </a:outerShdw>
           </a:effectLst>
         </p:spPr>
+        <p:txBody>
+          <a:bodyPr/>
+          <a:lstStyle/>
+          <a:p>
+            <a:endParaRPr lang="en-US"/>
+          </a:p>
+        </p:txBody>
       </p:sp>
       <p:sp>
         <p:nvSpPr>
@@ -2674,6 +2682,13 @@
             <a:prstDash val="solid"/>
           </a:ln>
         </p:spPr>
+        <p:txBody>
+          <a:bodyPr/>
+          <a:lstStyle/>
+          <a:p>
+            <a:endParaRPr lang="en-US"/>
+          </a:p>
+        </p:txBody>
       </p:sp>
       <p:sp>
         <p:nvSpPr>
@@ -2892,6 +2907,13 @@
             </a:outerShdw>
           </a:effectLst>
         </p:spPr>
+        <p:txBody>
+          <a:bodyPr/>
+          <a:lstStyle/>
+          <a:p>
+            <a:endParaRPr lang="en-US"/>
+          </a:p>
+        </p:txBody>
       </p:sp>
       <p:sp>
         <p:nvSpPr>
@@ -2917,6 +2939,13 @@
             <a:prstDash val="solid"/>
           </a:ln>
         </p:spPr>
+        <p:txBody>
+          <a:bodyPr/>
+          <a:lstStyle/>
+          <a:p>
+            <a:endParaRPr lang="en-US"/>
+          </a:p>
+        </p:txBody>
       </p:sp>
       <p:sp>
         <p:nvSpPr>
@@ -3135,6 +3164,13 @@
             </a:outerShdw>
           </a:effectLst>
         </p:spPr>
+        <p:txBody>
+          <a:bodyPr/>
+          <a:lstStyle/>
+          <a:p>
+            <a:endParaRPr lang="en-US"/>
+          </a:p>
+        </p:txBody>
       </p:sp>
       <p:sp>
         <p:nvSpPr>
@@ -3160,6 +3196,13 @@
             <a:prstDash val="solid"/>
           </a:ln>
         </p:spPr>
+        <p:txBody>
+          <a:bodyPr/>
+          <a:lstStyle/>
+          <a:p>
+            <a:endParaRPr lang="en-US"/>
+          </a:p>
+        </p:txBody>
       </p:sp>
       <p:sp>
         <p:nvSpPr>
@@ -3378,6 +3421,13 @@
             </a:outerShdw>
           </a:effectLst>
         </p:spPr>
+        <p:txBody>
+          <a:bodyPr/>
+          <a:lstStyle/>
+          <a:p>
+            <a:endParaRPr lang="en-US"/>
+          </a:p>
+        </p:txBody>
       </p:sp>
       <p:sp>
         <p:nvSpPr>
@@ -3403,6 +3453,13 @@
             <a:prstDash val="solid"/>
           </a:ln>
         </p:spPr>
+        <p:txBody>
+          <a:bodyPr/>
+          <a:lstStyle/>
+          <a:p>
+            <a:endParaRPr lang="en-US"/>
+          </a:p>
+        </p:txBody>
       </p:sp>
       <p:sp>
         <p:nvSpPr>
@@ -3578,6 +3635,13 @@
             <a:prstDash val="solid"/>
           </a:ln>
         </p:spPr>
+        <p:txBody>
+          <a:bodyPr/>
+          <a:lstStyle/>
+          <a:p>
+            <a:endParaRPr lang="en-US"/>
+          </a:p>
+        </p:txBody>
       </p:sp>
       <p:sp>
         <p:nvSpPr>
@@ -3709,7 +3773,7 @@
           </a:prstGeom>
           <a:extLst>
             <a:ext uri="{C572A759-6A51-4108-AA02-DFA0A04FC94B}">
-              <ma14:wrappingTextBoxFlag xmlns="" xmlns:ma14="http://schemas.microsoft.com/office/mac/drawingml/2011/main" val="0"/>
+              <ma14:wrappingTextBoxFlag xmlns:ma14="http://schemas.microsoft.com/office/mac/drawingml/2011/main" xmlns="" val="0"/>
             </a:ext>
           </a:extLst>
         </p:spPr>
@@ -3898,6 +3962,13 @@
             <a:tailEnd type="none"/>
           </a:ln>
         </p:spPr>
+        <p:txBody>
+          <a:bodyPr/>
+          <a:lstStyle/>
+          <a:p>
+            <a:endParaRPr lang="en-US"/>
+          </a:p>
+        </p:txBody>
       </p:sp>
       <p:sp>
         <p:nvSpPr>
@@ -3923,6 +3994,13 @@
             <a:prstDash val="solid"/>
           </a:ln>
         </p:spPr>
+        <p:txBody>
+          <a:bodyPr/>
+          <a:lstStyle/>
+          <a:p>
+            <a:endParaRPr lang="en-US"/>
+          </a:p>
+        </p:txBody>
       </p:sp>
       <p:sp>
         <p:nvSpPr>
@@ -4060,6 +4138,13 @@
             <a:prstDash val="solid"/>
           </a:ln>
         </p:spPr>
+        <p:txBody>
+          <a:bodyPr/>
+          <a:lstStyle/>
+          <a:p>
+            <a:endParaRPr lang="en-US"/>
+          </a:p>
+        </p:txBody>
       </p:sp>
       <p:sp>
         <p:nvSpPr>
@@ -4197,6 +4282,13 @@
             <a:prstDash val="solid"/>
           </a:ln>
         </p:spPr>
+        <p:txBody>
+          <a:bodyPr/>
+          <a:lstStyle/>
+          <a:p>
+            <a:endParaRPr lang="en-US"/>
+          </a:p>
+        </p:txBody>
       </p:sp>
       <p:sp>
         <p:nvSpPr>
@@ -4334,6 +4426,13 @@
             <a:prstDash val="solid"/>
           </a:ln>
         </p:spPr>
+        <p:txBody>
+          <a:bodyPr/>
+          <a:lstStyle/>
+          <a:p>
+            <a:endParaRPr lang="en-US"/>
+          </a:p>
+        </p:txBody>
       </p:sp>
       <p:sp>
         <p:nvSpPr>
@@ -4471,6 +4570,13 @@
             <a:prstDash val="solid"/>
           </a:ln>
         </p:spPr>
+        <p:txBody>
+          <a:bodyPr/>
+          <a:lstStyle/>
+          <a:p>
+            <a:endParaRPr lang="en-US"/>
+          </a:p>
+        </p:txBody>
       </p:sp>
       <p:sp>
         <p:nvSpPr>
@@ -4608,6 +4714,13 @@
             <a:prstDash val="solid"/>
           </a:ln>
         </p:spPr>
+        <p:txBody>
+          <a:bodyPr/>
+          <a:lstStyle/>
+          <a:p>
+            <a:endParaRPr lang="en-US"/>
+          </a:p>
+        </p:txBody>
       </p:sp>
       <p:sp>
         <p:nvSpPr>
@@ -4747,6 +4860,13 @@
             <a:prstDash val="solid"/>
           </a:ln>
         </p:spPr>
+        <p:txBody>
+          <a:bodyPr/>
+          <a:lstStyle/>
+          <a:p>
+            <a:endParaRPr lang="en-US"/>
+          </a:p>
+        </p:txBody>
       </p:sp>
       <p:sp>
         <p:nvSpPr>
@@ -4878,7 +4998,7 @@
           </a:prstGeom>
           <a:extLst>
             <a:ext uri="{C572A759-6A51-4108-AA02-DFA0A04FC94B}">
-              <ma14:wrappingTextBoxFlag xmlns="" xmlns:ma14="http://schemas.microsoft.com/office/mac/drawingml/2011/main" val="0"/>
+              <ma14:wrappingTextBoxFlag xmlns:ma14="http://schemas.microsoft.com/office/mac/drawingml/2011/main" xmlns="" val="0"/>
             </a:ext>
           </a:extLst>
         </p:spPr>
@@ -4915,6 +5035,1080 @@
 </file>
 
 <file path=ppt/slides/slide12.xml><?xml version="1.0" encoding="utf-8"?>
+<p:sld xmlns:a="http://schemas.openxmlformats.org/drawingml/2006/main" xmlns:r="http://schemas.openxmlformats.org/officeDocument/2006/relationships" xmlns:p="http://schemas.openxmlformats.org/presentationml/2006/main">
+  <p:cSld>
+    <p:spTree>
+      <p:nvGrpSpPr>
+        <p:cNvPr id="1" name=""/>
+        <p:cNvGrpSpPr/>
+        <p:nvPr/>
+      </p:nvGrpSpPr>
+      <p:grpSpPr>
+        <a:xfrm>
+          <a:off x="0" y="0"/>
+          <a:ext cx="0" cy="0"/>
+          <a:chOff x="0" y="0"/>
+          <a:chExt cx="0" cy="0"/>
+        </a:xfrm>
+      </p:grpSpPr>
+      <p:sp>
+        <p:nvSpPr>
+          <p:cNvPr id="3" name="Text 0">
+            <a:extLst>
+              <a:ext uri="{FF2B5EF4-FFF2-40B4-BE49-F238E27FC236}">
+                <a16:creationId xmlns:a16="http://schemas.microsoft.com/office/drawing/2014/main" id="{F331D54A-628F-09DA-CC48-7C3EB7556CCB}"/>
+              </a:ext>
+            </a:extLst>
+          </p:cNvPr>
+          <p:cNvSpPr/>
+          <p:nvPr/>
+        </p:nvSpPr>
+        <p:spPr>
+          <a:xfrm>
+            <a:off x="502920" y="256032"/>
+            <a:ext cx="5029200" cy="228600"/>
+          </a:xfrm>
+          <a:prstGeom prst="rect">
+            <a:avLst/>
+          </a:prstGeom>
+          <a:noFill/>
+          <a:ln/>
+        </p:spPr>
+        <p:txBody>
+          <a:bodyPr wrap="square" lIns="0" tIns="0" rIns="0" bIns="0" rtlCol="0" anchor="ctr">
+            <a:normAutofit/>
+          </a:bodyPr>
+          <a:lstStyle/>
+          <a:p>
+            <a:pPr marL="0" indent="0" algn="l">
+              <a:buNone/>
+            </a:pPr>
+            <a:r>
+              <a:rPr lang="en-US" sz="1100" b="1" dirty="0">
+                <a:solidFill>
+                  <a:srgbClr val="3B82F6"/>
+                </a:solidFill>
+                <a:latin typeface="Aptos" pitchFamily="34" charset="0"/>
+                <a:ea typeface="Aptos" pitchFamily="34" charset="-122"/>
+                <a:cs typeface="Aptos" pitchFamily="34" charset="-120"/>
+              </a:rPr>
+              <a:t>SOCIAL RESPONSIBILITY</a:t>
+            </a:r>
+            <a:endParaRPr lang="en-US" sz="1100" dirty="0"/>
+          </a:p>
+        </p:txBody>
+      </p:sp>
+      <p:sp>
+        <p:nvSpPr>
+          <p:cNvPr id="5" name="Text 1">
+            <a:extLst>
+              <a:ext uri="{FF2B5EF4-FFF2-40B4-BE49-F238E27FC236}">
+                <a16:creationId xmlns:a16="http://schemas.microsoft.com/office/drawing/2014/main" id="{779A801F-015B-1B27-C423-1C2E198C1ACF}"/>
+              </a:ext>
+            </a:extLst>
+          </p:cNvPr>
+          <p:cNvSpPr/>
+          <p:nvPr/>
+        </p:nvSpPr>
+        <p:spPr>
+          <a:xfrm>
+            <a:off x="502920" y="566928"/>
+            <a:ext cx="11064240" cy="502920"/>
+          </a:xfrm>
+          <a:prstGeom prst="rect">
+            <a:avLst/>
+          </a:prstGeom>
+          <a:noFill/>
+          <a:ln/>
+        </p:spPr>
+        <p:txBody>
+          <a:bodyPr wrap="square" lIns="0" tIns="0" rIns="0" bIns="0" rtlCol="0" anchor="ctr">
+            <a:normAutofit/>
+          </a:bodyPr>
+          <a:lstStyle/>
+          <a:p>
+            <a:pPr marL="0" indent="0" algn="l">
+              <a:buNone/>
+            </a:pPr>
+            <a:r>
+              <a:rPr lang="en-US" sz="2400" b="1" dirty="0">
+                <a:solidFill>
+                  <a:srgbClr val="17212B"/>
+                </a:solidFill>
+                <a:latin typeface="Aptos" pitchFamily="34" charset="0"/>
+                <a:ea typeface="Aptos" pitchFamily="34" charset="-122"/>
+                <a:cs typeface="Aptos" pitchFamily="34" charset="-120"/>
+              </a:rPr>
+              <a:t>Inclusive planning with transparent, human-controlled AI</a:t>
+            </a:r>
+            <a:endParaRPr lang="en-US" sz="2400" dirty="0"/>
+          </a:p>
+        </p:txBody>
+      </p:sp>
+      <p:sp>
+        <p:nvSpPr>
+          <p:cNvPr id="7" name="Text 2">
+            <a:extLst>
+              <a:ext uri="{FF2B5EF4-FFF2-40B4-BE49-F238E27FC236}">
+                <a16:creationId xmlns:a16="http://schemas.microsoft.com/office/drawing/2014/main" id="{700E4857-EFF1-46C6-D44F-C3AA11D056D0}"/>
+              </a:ext>
+            </a:extLst>
+          </p:cNvPr>
+          <p:cNvSpPr/>
+          <p:nvPr/>
+        </p:nvSpPr>
+        <p:spPr>
+          <a:xfrm>
+            <a:off x="502920" y="1078992"/>
+            <a:ext cx="11064240" cy="329184"/>
+          </a:xfrm>
+          <a:prstGeom prst="rect">
+            <a:avLst/>
+          </a:prstGeom>
+          <a:noFill/>
+          <a:ln/>
+        </p:spPr>
+        <p:txBody>
+          <a:bodyPr wrap="square" lIns="0" tIns="0" rIns="0" bIns="0" rtlCol="0" anchor="ctr">
+            <a:normAutofit/>
+          </a:bodyPr>
+          <a:lstStyle/>
+          <a:p>
+            <a:pPr marL="0" indent="0" algn="l">
+              <a:buNone/>
+            </a:pPr>
+            <a:r>
+              <a:rPr lang="en-US" sz="1250" dirty="0">
+                <a:solidFill>
+                  <a:srgbClr val="5B6777"/>
+                </a:solidFill>
+                <a:latin typeface="Aptos" pitchFamily="34" charset="0"/>
+                <a:ea typeface="Aptos" pitchFamily="34" charset="-122"/>
+                <a:cs typeface="Aptos" pitchFamily="34" charset="-120"/>
+              </a:rPr>
+              <a:t>Tripolr connects social responsibility directly to product design and measurable pilot behaviour.</a:t>
+            </a:r>
+            <a:endParaRPr lang="en-US" sz="1250" dirty="0"/>
+          </a:p>
+        </p:txBody>
+      </p:sp>
+      <p:sp>
+        <p:nvSpPr>
+          <p:cNvPr id="9" name="Shape 3">
+            <a:extLst>
+              <a:ext uri="{FF2B5EF4-FFF2-40B4-BE49-F238E27FC236}">
+                <a16:creationId xmlns:a16="http://schemas.microsoft.com/office/drawing/2014/main" id="{5D53FC8F-C5AB-7F98-BAE9-F0DC9ABD3539}"/>
+              </a:ext>
+            </a:extLst>
+          </p:cNvPr>
+          <p:cNvSpPr/>
+          <p:nvPr/>
+        </p:nvSpPr>
+        <p:spPr>
+          <a:xfrm>
+            <a:off x="502920" y="1664208"/>
+            <a:ext cx="2514600" cy="3401568"/>
+          </a:xfrm>
+          <a:prstGeom prst="roundRect">
+            <a:avLst>
+              <a:gd name="adj" fmla="val 2909"/>
+            </a:avLst>
+          </a:prstGeom>
+          <a:solidFill>
+            <a:srgbClr val="F8FAFD"/>
+          </a:solidFill>
+          <a:ln w="12700">
+            <a:solidFill>
+              <a:srgbClr val="DDE5EE"/>
+            </a:solidFill>
+            <a:prstDash val="solid"/>
+          </a:ln>
+        </p:spPr>
+        <p:txBody>
+          <a:bodyPr/>
+          <a:lstStyle/>
+          <a:p>
+            <a:endParaRPr lang="en-US"/>
+          </a:p>
+        </p:txBody>
+      </p:sp>
+      <p:sp>
+        <p:nvSpPr>
+          <p:cNvPr id="11" name="Text 4">
+            <a:extLst>
+              <a:ext uri="{FF2B5EF4-FFF2-40B4-BE49-F238E27FC236}">
+                <a16:creationId xmlns:a16="http://schemas.microsoft.com/office/drawing/2014/main" id="{234AE649-11BC-0807-240C-85B6F2EE42A3}"/>
+              </a:ext>
+            </a:extLst>
+          </p:cNvPr>
+          <p:cNvSpPr/>
+          <p:nvPr/>
+        </p:nvSpPr>
+        <p:spPr>
+          <a:xfrm>
+            <a:off x="667512" y="1810512"/>
+            <a:ext cx="2185416" cy="201168"/>
+          </a:xfrm>
+          <a:prstGeom prst="rect">
+            <a:avLst/>
+          </a:prstGeom>
+          <a:noFill/>
+          <a:ln/>
+        </p:spPr>
+        <p:txBody>
+          <a:bodyPr wrap="square" lIns="0" tIns="0" rIns="0" bIns="0" rtlCol="0" anchor="ctr">
+            <a:normAutofit/>
+          </a:bodyPr>
+          <a:lstStyle/>
+          <a:p>
+            <a:pPr marL="0" indent="0" algn="l">
+              <a:buNone/>
+            </a:pPr>
+            <a:r>
+              <a:rPr lang="en-US" sz="1000" b="1" dirty="0">
+                <a:solidFill>
+                  <a:srgbClr val="3B82F6"/>
+                </a:solidFill>
+                <a:latin typeface="Aptos" pitchFamily="34" charset="0"/>
+                <a:ea typeface="Aptos" pitchFamily="34" charset="-122"/>
+                <a:cs typeface="Aptos" pitchFamily="34" charset="-120"/>
+              </a:rPr>
+              <a:t>RESPONSIBLE AI</a:t>
+            </a:r>
+            <a:endParaRPr lang="en-US" sz="1000" dirty="0"/>
+          </a:p>
+        </p:txBody>
+      </p:sp>
+      <p:sp>
+        <p:nvSpPr>
+          <p:cNvPr id="13" name="Text 5">
+            <a:extLst>
+              <a:ext uri="{FF2B5EF4-FFF2-40B4-BE49-F238E27FC236}">
+                <a16:creationId xmlns:a16="http://schemas.microsoft.com/office/drawing/2014/main" id="{C33D8C4A-DEB7-2CEA-BB1C-95196BBBDBB0}"/>
+              </a:ext>
+            </a:extLst>
+          </p:cNvPr>
+          <p:cNvSpPr/>
+          <p:nvPr/>
+        </p:nvSpPr>
+        <p:spPr>
+          <a:xfrm>
+            <a:off x="667512" y="2103120"/>
+            <a:ext cx="2185416" cy="438912"/>
+          </a:xfrm>
+          <a:prstGeom prst="rect">
+            <a:avLst/>
+          </a:prstGeom>
+          <a:noFill/>
+          <a:ln/>
+        </p:spPr>
+        <p:txBody>
+          <a:bodyPr wrap="square" lIns="0" tIns="0" rIns="0" bIns="0" rtlCol="0" anchor="ctr">
+            <a:normAutofit fontScale="92500" lnSpcReduction="10000"/>
+          </a:bodyPr>
+          <a:lstStyle/>
+          <a:p>
+            <a:pPr marL="0" indent="0" algn="l">
+              <a:buNone/>
+            </a:pPr>
+            <a:r>
+              <a:rPr lang="en-US" sz="1600" b="1" dirty="0">
+                <a:solidFill>
+                  <a:srgbClr val="17212B"/>
+                </a:solidFill>
+                <a:latin typeface="Aptos" pitchFamily="34" charset="0"/>
+                <a:ea typeface="Aptos" pitchFamily="34" charset="-122"/>
+                <a:cs typeface="Aptos" pitchFamily="34" charset="-120"/>
+              </a:rPr>
+              <a:t>Suggestions, not guaranteed decisions</a:t>
+            </a:r>
+            <a:endParaRPr lang="en-US" sz="1600" dirty="0"/>
+          </a:p>
+        </p:txBody>
+      </p:sp>
+      <p:sp>
+        <p:nvSpPr>
+          <p:cNvPr id="15" name="Text 6">
+            <a:extLst>
+              <a:ext uri="{FF2B5EF4-FFF2-40B4-BE49-F238E27FC236}">
+                <a16:creationId xmlns:a16="http://schemas.microsoft.com/office/drawing/2014/main" id="{99C09195-D1D9-C29A-71D9-CDC4DCDC2E6E}"/>
+              </a:ext>
+            </a:extLst>
+          </p:cNvPr>
+          <p:cNvSpPr/>
+          <p:nvPr/>
+        </p:nvSpPr>
+        <p:spPr>
+          <a:xfrm>
+            <a:off x="667512" y="2596896"/>
+            <a:ext cx="2185416" cy="2322576"/>
+          </a:xfrm>
+          <a:prstGeom prst="rect">
+            <a:avLst/>
+          </a:prstGeom>
+          <a:noFill/>
+          <a:ln/>
+        </p:spPr>
+        <p:txBody>
+          <a:bodyPr wrap="square" lIns="0" tIns="0" rIns="0" bIns="0" rtlCol="0" anchor="ctr">
+            <a:normAutofit/>
+          </a:bodyPr>
+          <a:lstStyle/>
+          <a:p>
+            <a:pPr marL="0" indent="0" algn="l">
+              <a:buNone/>
+            </a:pPr>
+            <a:r>
+              <a:rPr lang="en-US" sz="1150" dirty="0">
+                <a:solidFill>
+                  <a:srgbClr val="5B6777"/>
+                </a:solidFill>
+                <a:latin typeface="Aptos" pitchFamily="34" charset="0"/>
+                <a:ea typeface="Aptos" pitchFamily="34" charset="-122"/>
+                <a:cs typeface="Aptos" pitchFamily="34" charset="-120"/>
+              </a:rPr>
+              <a:t>Users review, edit, accept or reject AI outputs. Important details are flagged for verification and paid content is labelled.</a:t>
+            </a:r>
+            <a:endParaRPr lang="en-US" sz="1150" dirty="0"/>
+          </a:p>
+        </p:txBody>
+      </p:sp>
+      <p:sp>
+        <p:nvSpPr>
+          <p:cNvPr id="17" name="Shape 7">
+            <a:extLst>
+              <a:ext uri="{FF2B5EF4-FFF2-40B4-BE49-F238E27FC236}">
+                <a16:creationId xmlns:a16="http://schemas.microsoft.com/office/drawing/2014/main" id="{90DD5616-9CBC-60E2-FB8C-564E98245930}"/>
+              </a:ext>
+            </a:extLst>
+          </p:cNvPr>
+          <p:cNvSpPr/>
+          <p:nvPr/>
+        </p:nvSpPr>
+        <p:spPr>
+          <a:xfrm>
+            <a:off x="3291840" y="1664208"/>
+            <a:ext cx="2514600" cy="3401568"/>
+          </a:xfrm>
+          <a:prstGeom prst="roundRect">
+            <a:avLst>
+              <a:gd name="adj" fmla="val 2909"/>
+            </a:avLst>
+          </a:prstGeom>
+          <a:solidFill>
+            <a:srgbClr val="F8FAFD"/>
+          </a:solidFill>
+          <a:ln w="12700">
+            <a:solidFill>
+              <a:srgbClr val="DDE5EE"/>
+            </a:solidFill>
+            <a:prstDash val="solid"/>
+          </a:ln>
+        </p:spPr>
+        <p:txBody>
+          <a:bodyPr/>
+          <a:lstStyle/>
+          <a:p>
+            <a:endParaRPr lang="en-US"/>
+          </a:p>
+        </p:txBody>
+      </p:sp>
+      <p:sp>
+        <p:nvSpPr>
+          <p:cNvPr id="19" name="Text 8">
+            <a:extLst>
+              <a:ext uri="{FF2B5EF4-FFF2-40B4-BE49-F238E27FC236}">
+                <a16:creationId xmlns:a16="http://schemas.microsoft.com/office/drawing/2014/main" id="{D957E139-863F-9F26-186E-1F16EA357130}"/>
+              </a:ext>
+            </a:extLst>
+          </p:cNvPr>
+          <p:cNvSpPr/>
+          <p:nvPr/>
+        </p:nvSpPr>
+        <p:spPr>
+          <a:xfrm>
+            <a:off x="3456432" y="1810512"/>
+            <a:ext cx="2185416" cy="201168"/>
+          </a:xfrm>
+          <a:prstGeom prst="rect">
+            <a:avLst/>
+          </a:prstGeom>
+          <a:noFill/>
+          <a:ln/>
+        </p:spPr>
+        <p:txBody>
+          <a:bodyPr wrap="square" lIns="0" tIns="0" rIns="0" bIns="0" rtlCol="0" anchor="ctr">
+            <a:normAutofit/>
+          </a:bodyPr>
+          <a:lstStyle/>
+          <a:p>
+            <a:pPr marL="0" indent="0" algn="l">
+              <a:buNone/>
+            </a:pPr>
+            <a:r>
+              <a:rPr lang="en-US" sz="1000" b="1" dirty="0">
+                <a:solidFill>
+                  <a:srgbClr val="2F855A"/>
+                </a:solidFill>
+                <a:latin typeface="Aptos" pitchFamily="34" charset="0"/>
+                <a:ea typeface="Aptos" pitchFamily="34" charset="-122"/>
+                <a:cs typeface="Aptos" pitchFamily="34" charset="-120"/>
+              </a:rPr>
+              <a:t>PRIVACY BY DESIGN</a:t>
+            </a:r>
+            <a:endParaRPr lang="en-US" sz="1000" dirty="0"/>
+          </a:p>
+        </p:txBody>
+      </p:sp>
+      <p:sp>
+        <p:nvSpPr>
+          <p:cNvPr id="21" name="Text 9">
+            <a:extLst>
+              <a:ext uri="{FF2B5EF4-FFF2-40B4-BE49-F238E27FC236}">
+                <a16:creationId xmlns:a16="http://schemas.microsoft.com/office/drawing/2014/main" id="{480BF9FD-B737-D182-4405-ED11E7366157}"/>
+              </a:ext>
+            </a:extLst>
+          </p:cNvPr>
+          <p:cNvSpPr/>
+          <p:nvPr/>
+        </p:nvSpPr>
+        <p:spPr>
+          <a:xfrm>
+            <a:off x="3456432" y="2103120"/>
+            <a:ext cx="2185416" cy="438912"/>
+          </a:xfrm>
+          <a:prstGeom prst="rect">
+            <a:avLst/>
+          </a:prstGeom>
+          <a:noFill/>
+          <a:ln/>
+        </p:spPr>
+        <p:txBody>
+          <a:bodyPr wrap="square" lIns="0" tIns="0" rIns="0" bIns="0" rtlCol="0" anchor="ctr">
+            <a:normAutofit fontScale="92500" lnSpcReduction="10000"/>
+          </a:bodyPr>
+          <a:lstStyle/>
+          <a:p>
+            <a:pPr marL="0" indent="0" algn="l">
+              <a:buNone/>
+            </a:pPr>
+            <a:r>
+              <a:rPr lang="en-US" sz="1600" b="1" dirty="0">
+                <a:solidFill>
+                  <a:srgbClr val="17212B"/>
+                </a:solidFill>
+                <a:latin typeface="Aptos" pitchFamily="34" charset="0"/>
+                <a:ea typeface="Aptos" pitchFamily="34" charset="-122"/>
+                <a:cs typeface="Aptos" pitchFamily="34" charset="-120"/>
+              </a:rPr>
+              <a:t>Control over shared trip information</a:t>
+            </a:r>
+            <a:endParaRPr lang="en-US" sz="1600" dirty="0"/>
+          </a:p>
+        </p:txBody>
+      </p:sp>
+      <p:sp>
+        <p:nvSpPr>
+          <p:cNvPr id="23" name="Text 10">
+            <a:extLst>
+              <a:ext uri="{FF2B5EF4-FFF2-40B4-BE49-F238E27FC236}">
+                <a16:creationId xmlns:a16="http://schemas.microsoft.com/office/drawing/2014/main" id="{BFDF8DEE-C9FB-29BE-34DB-039D41DEABF8}"/>
+              </a:ext>
+            </a:extLst>
+          </p:cNvPr>
+          <p:cNvSpPr/>
+          <p:nvPr/>
+        </p:nvSpPr>
+        <p:spPr>
+          <a:xfrm>
+            <a:off x="3456432" y="2596896"/>
+            <a:ext cx="2185416" cy="2322576"/>
+          </a:xfrm>
+          <a:prstGeom prst="rect">
+            <a:avLst/>
+          </a:prstGeom>
+          <a:noFill/>
+          <a:ln/>
+        </p:spPr>
+        <p:txBody>
+          <a:bodyPr wrap="square" lIns="0" tIns="0" rIns="0" bIns="0" rtlCol="0" anchor="ctr">
+            <a:normAutofit/>
+          </a:bodyPr>
+          <a:lstStyle/>
+          <a:p>
+            <a:pPr marL="0" indent="0" algn="l">
+              <a:buNone/>
+            </a:pPr>
+            <a:r>
+              <a:rPr lang="en-US" sz="1150" dirty="0">
+                <a:solidFill>
+                  <a:srgbClr val="5B6777"/>
+                </a:solidFill>
+                <a:latin typeface="Aptos" pitchFamily="34" charset="0"/>
+                <a:ea typeface="Aptos" pitchFamily="34" charset="-122"/>
+                <a:cs typeface="Aptos" pitchFamily="34" charset="-120"/>
+              </a:rPr>
+              <a:t>Minimise data collection and provide clear controls over who can view or edit preferences, locations and schedules.</a:t>
+            </a:r>
+            <a:endParaRPr lang="en-US" sz="1150" dirty="0"/>
+          </a:p>
+        </p:txBody>
+      </p:sp>
+      <p:sp>
+        <p:nvSpPr>
+          <p:cNvPr id="25" name="Shape 11">
+            <a:extLst>
+              <a:ext uri="{FF2B5EF4-FFF2-40B4-BE49-F238E27FC236}">
+                <a16:creationId xmlns:a16="http://schemas.microsoft.com/office/drawing/2014/main" id="{27E4A372-B3D2-35D0-F558-3773ED13798A}"/>
+              </a:ext>
+            </a:extLst>
+          </p:cNvPr>
+          <p:cNvSpPr/>
+          <p:nvPr/>
+        </p:nvSpPr>
+        <p:spPr>
+          <a:xfrm>
+            <a:off x="6080760" y="1664208"/>
+            <a:ext cx="2514600" cy="3401568"/>
+          </a:xfrm>
+          <a:prstGeom prst="roundRect">
+            <a:avLst>
+              <a:gd name="adj" fmla="val 2909"/>
+            </a:avLst>
+          </a:prstGeom>
+          <a:solidFill>
+            <a:srgbClr val="F8FAFD"/>
+          </a:solidFill>
+          <a:ln w="12700">
+            <a:solidFill>
+              <a:srgbClr val="DDE5EE"/>
+            </a:solidFill>
+            <a:prstDash val="solid"/>
+          </a:ln>
+        </p:spPr>
+        <p:txBody>
+          <a:bodyPr/>
+          <a:lstStyle/>
+          <a:p>
+            <a:endParaRPr lang="en-US"/>
+          </a:p>
+        </p:txBody>
+      </p:sp>
+      <p:sp>
+        <p:nvSpPr>
+          <p:cNvPr id="27" name="Text 12">
+            <a:extLst>
+              <a:ext uri="{FF2B5EF4-FFF2-40B4-BE49-F238E27FC236}">
+                <a16:creationId xmlns:a16="http://schemas.microsoft.com/office/drawing/2014/main" id="{E1AAE538-CD62-F3B0-CFAD-E7B242A55C14}"/>
+              </a:ext>
+            </a:extLst>
+          </p:cNvPr>
+          <p:cNvSpPr/>
+          <p:nvPr/>
+        </p:nvSpPr>
+        <p:spPr>
+          <a:xfrm>
+            <a:off x="6245352" y="1810512"/>
+            <a:ext cx="2185416" cy="201168"/>
+          </a:xfrm>
+          <a:prstGeom prst="rect">
+            <a:avLst/>
+          </a:prstGeom>
+          <a:noFill/>
+          <a:ln/>
+        </p:spPr>
+        <p:txBody>
+          <a:bodyPr wrap="square" lIns="0" tIns="0" rIns="0" bIns="0" rtlCol="0" anchor="ctr">
+            <a:normAutofit/>
+          </a:bodyPr>
+          <a:lstStyle/>
+          <a:p>
+            <a:pPr marL="0" indent="0" algn="l">
+              <a:buNone/>
+            </a:pPr>
+            <a:r>
+              <a:rPr lang="en-US" sz="1000" b="1" dirty="0">
+                <a:solidFill>
+                  <a:srgbClr val="9A5A1A"/>
+                </a:solidFill>
+                <a:latin typeface="Aptos" pitchFamily="34" charset="0"/>
+                <a:ea typeface="Aptos" pitchFamily="34" charset="-122"/>
+                <a:cs typeface="Aptos" pitchFamily="34" charset="-120"/>
+              </a:rPr>
+              <a:t>INCLUSIVE PLANNING</a:t>
+            </a:r>
+            <a:endParaRPr lang="en-US" sz="1000" dirty="0"/>
+          </a:p>
+        </p:txBody>
+      </p:sp>
+      <p:sp>
+        <p:nvSpPr>
+          <p:cNvPr id="29" name="Text 13">
+            <a:extLst>
+              <a:ext uri="{FF2B5EF4-FFF2-40B4-BE49-F238E27FC236}">
+                <a16:creationId xmlns:a16="http://schemas.microsoft.com/office/drawing/2014/main" id="{7383FB55-D35E-FA22-5C27-340A296BDC30}"/>
+              </a:ext>
+            </a:extLst>
+          </p:cNvPr>
+          <p:cNvSpPr/>
+          <p:nvPr/>
+        </p:nvSpPr>
+        <p:spPr>
+          <a:xfrm>
+            <a:off x="6245352" y="2103120"/>
+            <a:ext cx="2185416" cy="438912"/>
+          </a:xfrm>
+          <a:prstGeom prst="rect">
+            <a:avLst/>
+          </a:prstGeom>
+          <a:noFill/>
+          <a:ln/>
+        </p:spPr>
+        <p:txBody>
+          <a:bodyPr wrap="square" lIns="0" tIns="0" rIns="0" bIns="0" rtlCol="0" anchor="ctr">
+            <a:normAutofit fontScale="92500" lnSpcReduction="10000"/>
+          </a:bodyPr>
+          <a:lstStyle/>
+          <a:p>
+            <a:pPr marL="0" indent="0" algn="l">
+              <a:buNone/>
+            </a:pPr>
+            <a:r>
+              <a:rPr lang="en-US" sz="1600" b="1" dirty="0">
+                <a:solidFill>
+                  <a:srgbClr val="17212B"/>
+                </a:solidFill>
+                <a:latin typeface="Aptos" pitchFamily="34" charset="0"/>
+                <a:ea typeface="Aptos" pitchFamily="34" charset="-122"/>
+                <a:cs typeface="Aptos" pitchFamily="34" charset="-120"/>
+              </a:rPr>
+              <a:t>Make different needs visible</a:t>
+            </a:r>
+            <a:endParaRPr lang="en-US" sz="1600" dirty="0"/>
+          </a:p>
+        </p:txBody>
+      </p:sp>
+      <p:sp>
+        <p:nvSpPr>
+          <p:cNvPr id="31" name="Text 14">
+            <a:extLst>
+              <a:ext uri="{FF2B5EF4-FFF2-40B4-BE49-F238E27FC236}">
+                <a16:creationId xmlns:a16="http://schemas.microsoft.com/office/drawing/2014/main" id="{A4399CB7-8F9A-4712-9D4C-845C92185868}"/>
+              </a:ext>
+            </a:extLst>
+          </p:cNvPr>
+          <p:cNvSpPr/>
+          <p:nvPr/>
+        </p:nvSpPr>
+        <p:spPr>
+          <a:xfrm>
+            <a:off x="6245352" y="2596896"/>
+            <a:ext cx="2185416" cy="2322576"/>
+          </a:xfrm>
+          <a:prstGeom prst="rect">
+            <a:avLst/>
+          </a:prstGeom>
+          <a:noFill/>
+          <a:ln/>
+        </p:spPr>
+        <p:txBody>
+          <a:bodyPr wrap="square" lIns="0" tIns="0" rIns="0" bIns="0" rtlCol="0" anchor="ctr">
+            <a:normAutofit/>
+          </a:bodyPr>
+          <a:lstStyle/>
+          <a:p>
+            <a:pPr marL="0" indent="0" algn="l">
+              <a:buNone/>
+            </a:pPr>
+            <a:r>
+              <a:rPr lang="en-US" sz="1150" dirty="0">
+                <a:solidFill>
+                  <a:srgbClr val="5B6777"/>
+                </a:solidFill>
+                <a:latin typeface="Aptos" pitchFamily="34" charset="0"/>
+                <a:ea typeface="Aptos" pitchFamily="34" charset="-122"/>
+                <a:cs typeface="Aptos" pitchFamily="34" charset="-120"/>
+              </a:rPr>
+              <a:t>Consider budget, pace, time and accessibility so planning does not depend on one organiser or the loudest voice.</a:t>
+            </a:r>
+            <a:endParaRPr lang="en-US" sz="1150" dirty="0"/>
+          </a:p>
+        </p:txBody>
+      </p:sp>
+      <p:sp>
+        <p:nvSpPr>
+          <p:cNvPr id="33" name="Shape 15">
+            <a:extLst>
+              <a:ext uri="{FF2B5EF4-FFF2-40B4-BE49-F238E27FC236}">
+                <a16:creationId xmlns:a16="http://schemas.microsoft.com/office/drawing/2014/main" id="{A6F2FF5D-69DB-EECA-3C41-A5AE57E47209}"/>
+              </a:ext>
+            </a:extLst>
+          </p:cNvPr>
+          <p:cNvSpPr/>
+          <p:nvPr/>
+        </p:nvSpPr>
+        <p:spPr>
+          <a:xfrm>
+            <a:off x="8869680" y="1664208"/>
+            <a:ext cx="2514600" cy="3401568"/>
+          </a:xfrm>
+          <a:prstGeom prst="roundRect">
+            <a:avLst>
+              <a:gd name="adj" fmla="val 2909"/>
+            </a:avLst>
+          </a:prstGeom>
+          <a:solidFill>
+            <a:srgbClr val="F8FAFD"/>
+          </a:solidFill>
+          <a:ln w="12700">
+            <a:solidFill>
+              <a:srgbClr val="DDE5EE"/>
+            </a:solidFill>
+            <a:prstDash val="solid"/>
+          </a:ln>
+        </p:spPr>
+        <p:txBody>
+          <a:bodyPr/>
+          <a:lstStyle/>
+          <a:p>
+            <a:endParaRPr lang="en-US"/>
+          </a:p>
+        </p:txBody>
+      </p:sp>
+      <p:sp>
+        <p:nvSpPr>
+          <p:cNvPr id="35" name="Text 16">
+            <a:extLst>
+              <a:ext uri="{FF2B5EF4-FFF2-40B4-BE49-F238E27FC236}">
+                <a16:creationId xmlns:a16="http://schemas.microsoft.com/office/drawing/2014/main" id="{8D2855A8-03C9-E8BD-A733-9D4EEED99977}"/>
+              </a:ext>
+            </a:extLst>
+          </p:cNvPr>
+          <p:cNvSpPr/>
+          <p:nvPr/>
+        </p:nvSpPr>
+        <p:spPr>
+          <a:xfrm>
+            <a:off x="9034272" y="1810512"/>
+            <a:ext cx="2185416" cy="201168"/>
+          </a:xfrm>
+          <a:prstGeom prst="rect">
+            <a:avLst/>
+          </a:prstGeom>
+          <a:noFill/>
+          <a:ln/>
+        </p:spPr>
+        <p:txBody>
+          <a:bodyPr wrap="square" lIns="0" tIns="0" rIns="0" bIns="0" rtlCol="0" anchor="ctr">
+            <a:normAutofit/>
+          </a:bodyPr>
+          <a:lstStyle/>
+          <a:p>
+            <a:pPr marL="0" indent="0" algn="l">
+              <a:buNone/>
+            </a:pPr>
+            <a:r>
+              <a:rPr lang="en-US" sz="1000" b="1" dirty="0">
+                <a:solidFill>
+                  <a:srgbClr val="3B82F6"/>
+                </a:solidFill>
+                <a:latin typeface="Aptos" pitchFamily="34" charset="0"/>
+                <a:ea typeface="Aptos" pitchFamily="34" charset="-122"/>
+                <a:cs typeface="Aptos" pitchFamily="34" charset="-120"/>
+              </a:rPr>
+              <a:t>FREE CORE ACCESS</a:t>
+            </a:r>
+            <a:endParaRPr lang="en-US" sz="1000" dirty="0"/>
+          </a:p>
+        </p:txBody>
+      </p:sp>
+      <p:sp>
+        <p:nvSpPr>
+          <p:cNvPr id="37" name="Text 17">
+            <a:extLst>
+              <a:ext uri="{FF2B5EF4-FFF2-40B4-BE49-F238E27FC236}">
+                <a16:creationId xmlns:a16="http://schemas.microsoft.com/office/drawing/2014/main" id="{A575FE31-DABF-95D1-B4F0-CD5189F84EBD}"/>
+              </a:ext>
+            </a:extLst>
+          </p:cNvPr>
+          <p:cNvSpPr/>
+          <p:nvPr/>
+        </p:nvSpPr>
+        <p:spPr>
+          <a:xfrm>
+            <a:off x="9034272" y="2103120"/>
+            <a:ext cx="2185416" cy="438912"/>
+          </a:xfrm>
+          <a:prstGeom prst="rect">
+            <a:avLst/>
+          </a:prstGeom>
+          <a:noFill/>
+          <a:ln/>
+        </p:spPr>
+        <p:txBody>
+          <a:bodyPr wrap="square" lIns="0" tIns="0" rIns="0" bIns="0" rtlCol="0" anchor="ctr">
+            <a:normAutofit fontScale="92500" lnSpcReduction="10000"/>
+          </a:bodyPr>
+          <a:lstStyle/>
+          <a:p>
+            <a:pPr marL="0" indent="0" algn="l">
+              <a:buNone/>
+            </a:pPr>
+            <a:r>
+              <a:rPr lang="en-US" sz="1600" b="1" dirty="0">
+                <a:solidFill>
+                  <a:srgbClr val="17212B"/>
+                </a:solidFill>
+                <a:latin typeface="Aptos" pitchFamily="34" charset="0"/>
+                <a:ea typeface="Aptos" pitchFamily="34" charset="-122"/>
+                <a:cs typeface="Aptos" pitchFamily="34" charset="-120"/>
+              </a:rPr>
+              <a:t>Lower barriers to participation</a:t>
+            </a:r>
+            <a:endParaRPr lang="en-US" sz="1600" dirty="0"/>
+          </a:p>
+        </p:txBody>
+      </p:sp>
+      <p:sp>
+        <p:nvSpPr>
+          <p:cNvPr id="39" name="Text 18">
+            <a:extLst>
+              <a:ext uri="{FF2B5EF4-FFF2-40B4-BE49-F238E27FC236}">
+                <a16:creationId xmlns:a16="http://schemas.microsoft.com/office/drawing/2014/main" id="{29504B14-3556-EBD9-E8CF-536B19969965}"/>
+              </a:ext>
+            </a:extLst>
+          </p:cNvPr>
+          <p:cNvSpPr/>
+          <p:nvPr/>
+        </p:nvSpPr>
+        <p:spPr>
+          <a:xfrm>
+            <a:off x="9034272" y="2596896"/>
+            <a:ext cx="2185416" cy="2322576"/>
+          </a:xfrm>
+          <a:prstGeom prst="rect">
+            <a:avLst/>
+          </a:prstGeom>
+          <a:noFill/>
+          <a:ln/>
+        </p:spPr>
+        <p:txBody>
+          <a:bodyPr wrap="square" lIns="0" tIns="0" rIns="0" bIns="0" rtlCol="0" anchor="ctr">
+            <a:normAutofit/>
+          </a:bodyPr>
+          <a:lstStyle/>
+          <a:p>
+            <a:pPr marL="0" indent="0" algn="l">
+              <a:buNone/>
+            </a:pPr>
+            <a:r>
+              <a:rPr lang="en-US" sz="1150" dirty="0">
+                <a:solidFill>
+                  <a:srgbClr val="5B6777"/>
+                </a:solidFill>
+                <a:latin typeface="Aptos" pitchFamily="34" charset="0"/>
+                <a:ea typeface="Aptos" pitchFamily="34" charset="-122"/>
+                <a:cs typeface="Aptos" pitchFamily="34" charset="-120"/>
+              </a:rPr>
+              <a:t>Core place collection, itinerary planning and collaboration remain free during validation.</a:t>
+            </a:r>
+            <a:endParaRPr lang="en-US" sz="1150" dirty="0"/>
+          </a:p>
+        </p:txBody>
+      </p:sp>
+      <p:sp>
+        <p:nvSpPr>
+          <p:cNvPr id="41" name="Shape 19">
+            <a:extLst>
+              <a:ext uri="{FF2B5EF4-FFF2-40B4-BE49-F238E27FC236}">
+                <a16:creationId xmlns:a16="http://schemas.microsoft.com/office/drawing/2014/main" id="{D554295E-DDD6-BAA6-A6EC-22133518DE0D}"/>
+              </a:ext>
+            </a:extLst>
+          </p:cNvPr>
+          <p:cNvSpPr/>
+          <p:nvPr/>
+        </p:nvSpPr>
+        <p:spPr>
+          <a:xfrm>
+            <a:off x="502920" y="5413248"/>
+            <a:ext cx="11183112" cy="868680"/>
+          </a:xfrm>
+          <a:prstGeom prst="roundRect">
+            <a:avLst/>
+          </a:prstGeom>
+          <a:solidFill>
+            <a:srgbClr val="15283B"/>
+          </a:solidFill>
+          <a:ln w="12700">
+            <a:solidFill>
+              <a:srgbClr val="15283B"/>
+            </a:solidFill>
+            <a:prstDash val="solid"/>
+          </a:ln>
+        </p:spPr>
+        <p:txBody>
+          <a:bodyPr/>
+          <a:lstStyle/>
+          <a:p>
+            <a:endParaRPr lang="en-US"/>
+          </a:p>
+        </p:txBody>
+      </p:sp>
+      <p:sp>
+        <p:nvSpPr>
+          <p:cNvPr id="43" name="Text 20">
+            <a:extLst>
+              <a:ext uri="{FF2B5EF4-FFF2-40B4-BE49-F238E27FC236}">
+                <a16:creationId xmlns:a16="http://schemas.microsoft.com/office/drawing/2014/main" id="{E5EB7764-38C0-CC5A-E80E-9B2B1B57CD8B}"/>
+              </a:ext>
+            </a:extLst>
+          </p:cNvPr>
+          <p:cNvSpPr/>
+          <p:nvPr/>
+        </p:nvSpPr>
+        <p:spPr>
+          <a:xfrm>
+            <a:off x="749808" y="5559552"/>
+            <a:ext cx="2057400" cy="201168"/>
+          </a:xfrm>
+          <a:prstGeom prst="rect">
+            <a:avLst/>
+          </a:prstGeom>
+          <a:noFill/>
+          <a:ln/>
+        </p:spPr>
+        <p:txBody>
+          <a:bodyPr wrap="square" lIns="0" tIns="0" rIns="0" bIns="0" rtlCol="0" anchor="ctr">
+            <a:normAutofit/>
+          </a:bodyPr>
+          <a:lstStyle/>
+          <a:p>
+            <a:pPr marL="0" indent="0" algn="l">
+              <a:buNone/>
+            </a:pPr>
+            <a:r>
+              <a:rPr lang="en-US" sz="1000" b="1" dirty="0">
+                <a:solidFill>
+                  <a:srgbClr val="77A7FF"/>
+                </a:solidFill>
+                <a:latin typeface="Aptos" pitchFamily="34" charset="0"/>
+                <a:ea typeface="Aptos" pitchFamily="34" charset="-122"/>
+                <a:cs typeface="Aptos" pitchFamily="34" charset="-120"/>
+              </a:rPr>
+              <a:t>CCMF PILOT INDICATORS</a:t>
+            </a:r>
+            <a:endParaRPr lang="en-US" sz="1000" dirty="0"/>
+          </a:p>
+        </p:txBody>
+      </p:sp>
+      <p:sp>
+        <p:nvSpPr>
+          <p:cNvPr id="45" name="Text 21">
+            <a:extLst>
+              <a:ext uri="{FF2B5EF4-FFF2-40B4-BE49-F238E27FC236}">
+                <a16:creationId xmlns:a16="http://schemas.microsoft.com/office/drawing/2014/main" id="{D3A0D085-19DC-1446-BD66-3888F42FF935}"/>
+              </a:ext>
+            </a:extLst>
+          </p:cNvPr>
+          <p:cNvSpPr/>
+          <p:nvPr/>
+        </p:nvSpPr>
+        <p:spPr>
+          <a:xfrm>
+            <a:off x="2560320" y="5504688"/>
+            <a:ext cx="8732520" cy="420624"/>
+          </a:xfrm>
+          <a:prstGeom prst="rect">
+            <a:avLst/>
+          </a:prstGeom>
+          <a:noFill/>
+          <a:ln/>
+        </p:spPr>
+        <p:txBody>
+          <a:bodyPr wrap="square" lIns="0" tIns="0" rIns="0" bIns="0" rtlCol="0" anchor="ctr">
+            <a:normAutofit/>
+          </a:bodyPr>
+          <a:lstStyle/>
+          <a:p>
+            <a:pPr marL="0" indent="0" algn="l">
+              <a:buNone/>
+            </a:pPr>
+            <a:r>
+              <a:rPr lang="en-US" sz="1400" b="1" dirty="0">
+                <a:solidFill>
+                  <a:srgbClr val="FFFFFF"/>
+                </a:solidFill>
+                <a:latin typeface="Aptos" pitchFamily="34" charset="0"/>
+                <a:ea typeface="Aptos" pitchFamily="34" charset="-122"/>
+                <a:cs typeface="Aptos" pitchFamily="34" charset="-120"/>
+              </a:rPr>
+              <a:t>Group contribution  •  itinerary review  •  AI clarity  •  permission-control usability</a:t>
+            </a:r>
+            <a:endParaRPr lang="en-US" sz="1400" dirty="0"/>
+          </a:p>
+        </p:txBody>
+      </p:sp>
+      <p:sp>
+        <p:nvSpPr>
+          <p:cNvPr id="47" name="Text 22">
+            <a:extLst>
+              <a:ext uri="{FF2B5EF4-FFF2-40B4-BE49-F238E27FC236}">
+                <a16:creationId xmlns:a16="http://schemas.microsoft.com/office/drawing/2014/main" id="{90DA0CCC-1A17-7384-2002-9B597DDCDBC6}"/>
+              </a:ext>
+            </a:extLst>
+          </p:cNvPr>
+          <p:cNvSpPr/>
+          <p:nvPr/>
+        </p:nvSpPr>
+        <p:spPr>
+          <a:xfrm>
+            <a:off x="731520" y="6355080"/>
+            <a:ext cx="10789920" cy="182880"/>
+          </a:xfrm>
+          <a:prstGeom prst="rect">
+            <a:avLst/>
+          </a:prstGeom>
+          <a:noFill/>
+          <a:ln/>
+        </p:spPr>
+        <p:txBody>
+          <a:bodyPr wrap="square" lIns="0" tIns="0" rIns="0" bIns="0" rtlCol="0" anchor="ctr">
+            <a:normAutofit/>
+          </a:bodyPr>
+          <a:lstStyle/>
+          <a:p>
+            <a:pPr marL="0" indent="0" algn="l">
+              <a:buNone/>
+            </a:pPr>
+            <a:r>
+              <a:rPr lang="en-US" sz="950" dirty="0">
+                <a:solidFill>
+                  <a:srgbClr val="5B6777"/>
+                </a:solidFill>
+                <a:latin typeface="Aptos" pitchFamily="34" charset="0"/>
+                <a:ea typeface="Aptos" pitchFamily="34" charset="-122"/>
+                <a:cs typeface="Aptos" pitchFamily="34" charset="-120"/>
+              </a:rPr>
+              <a:t>Route efficiency is a potential practical benefit. Environmental impact will only be claimed if measured.</a:t>
+            </a:r>
+            <a:endParaRPr lang="en-US" sz="950" dirty="0"/>
+          </a:p>
+        </p:txBody>
+      </p:sp>
+    </p:spTree>
+    <p:extLst>
+      <p:ext uri="{BB962C8B-B14F-4D97-AF65-F5344CB8AC3E}">
+        <p14:creationId xmlns:p14="http://schemas.microsoft.com/office/powerpoint/2010/main" val="2506419495"/>
+      </p:ext>
+    </p:extLst>
+  </p:cSld>
+  <p:clrMapOvr>
+    <a:masterClrMapping/>
+  </p:clrMapOvr>
+</p:sld>
+</file>
+
+<file path=ppt/slides/slide13.xml><?xml version="1.0" encoding="utf-8"?>
 <p:sld xmlns:a="http://schemas.openxmlformats.org/drawingml/2006/main" xmlns:r="http://schemas.openxmlformats.org/officeDocument/2006/relationships" xmlns:p="http://schemas.openxmlformats.org/presentationml/2006/main">
   <p:cSld name="Slide 11">
     <p:spTree>
@@ -5105,6 +6299,13 @@
             <a:prstDash val="solid"/>
           </a:ln>
         </p:spPr>
+        <p:txBody>
+          <a:bodyPr/>
+          <a:lstStyle/>
+          <a:p>
+            <a:endParaRPr lang="en-US"/>
+          </a:p>
+        </p:txBody>
       </p:sp>
       <p:sp>
         <p:nvSpPr>
@@ -5240,6 +6441,13 @@
             <a:prstDash val="solid"/>
           </a:ln>
         </p:spPr>
+        <p:txBody>
+          <a:bodyPr/>
+          <a:lstStyle/>
+          <a:p>
+            <a:endParaRPr lang="en-US"/>
+          </a:p>
+        </p:txBody>
       </p:sp>
       <p:sp>
         <p:nvSpPr>
@@ -5375,6 +6583,13 @@
             <a:prstDash val="solid"/>
           </a:ln>
         </p:spPr>
+        <p:txBody>
+          <a:bodyPr/>
+          <a:lstStyle/>
+          <a:p>
+            <a:endParaRPr lang="en-US"/>
+          </a:p>
+        </p:txBody>
       </p:sp>
       <p:sp>
         <p:nvSpPr>
@@ -5510,6 +6725,13 @@
             <a:prstDash val="solid"/>
           </a:ln>
         </p:spPr>
+        <p:txBody>
+          <a:bodyPr/>
+          <a:lstStyle/>
+          <a:p>
+            <a:endParaRPr lang="en-US"/>
+          </a:p>
+        </p:txBody>
       </p:sp>
       <p:sp>
         <p:nvSpPr>
@@ -5645,6 +6867,13 @@
             <a:prstDash val="solid"/>
           </a:ln>
         </p:spPr>
+        <p:txBody>
+          <a:bodyPr/>
+          <a:lstStyle/>
+          <a:p>
+            <a:endParaRPr lang="en-US"/>
+          </a:p>
+        </p:txBody>
       </p:sp>
       <p:sp>
         <p:nvSpPr>
@@ -5780,6 +7009,13 @@
             <a:prstDash val="solid"/>
           </a:ln>
         </p:spPr>
+        <p:txBody>
+          <a:bodyPr/>
+          <a:lstStyle/>
+          <a:p>
+            <a:endParaRPr lang="en-US"/>
+          </a:p>
+        </p:txBody>
       </p:sp>
       <p:sp>
         <p:nvSpPr>
@@ -5915,6 +7151,13 @@
             <a:prstDash val="solid"/>
           </a:ln>
         </p:spPr>
+        <p:txBody>
+          <a:bodyPr/>
+          <a:lstStyle/>
+          <a:p>
+            <a:endParaRPr lang="en-US"/>
+          </a:p>
+        </p:txBody>
       </p:sp>
       <p:sp>
         <p:nvSpPr>
@@ -6014,6 +7257,13 @@
             <a:prstDash val="solid"/>
           </a:ln>
         </p:spPr>
+        <p:txBody>
+          <a:bodyPr/>
+          <a:lstStyle/>
+          <a:p>
+            <a:endParaRPr lang="en-US"/>
+          </a:p>
+        </p:txBody>
       </p:sp>
       <p:sp>
         <p:nvSpPr>
@@ -6125,6 +7375,13 @@
             <a:prstDash val="solid"/>
           </a:ln>
         </p:spPr>
+        <p:txBody>
+          <a:bodyPr/>
+          <a:lstStyle/>
+          <a:p>
+            <a:endParaRPr lang="en-US"/>
+          </a:p>
+        </p:txBody>
       </p:sp>
       <p:sp>
         <p:nvSpPr>
@@ -6262,7 +7519,7 @@
           </a:prstGeom>
           <a:extLst>
             <a:ext uri="{C572A759-6A51-4108-AA02-DFA0A04FC94B}">
-              <ma14:wrappingTextBoxFlag xmlns="" xmlns:ma14="http://schemas.microsoft.com/office/mac/drawingml/2011/main" val="0"/>
+              <ma14:wrappingTextBoxFlag xmlns:ma14="http://schemas.microsoft.com/office/mac/drawingml/2011/main" xmlns="" val="0"/>
             </a:ext>
           </a:extLst>
         </p:spPr>
@@ -6284,7 +7541,7 @@
             <a:pPr algn="l"/>
             <a:fld id="{F7021451-1387-4CA6-816F-3879F97B5CBC}" type="slidenum">
               <a:rPr lang="en-US" b="0"/>
-              <a:t>12</a:t>
+              <a:t>13</a:t>
             </a:fld>
             <a:endParaRPr lang="en-US"/>
           </a:p>
@@ -6298,7 +7555,7 @@
 </p:sld>
 </file>
 
-<file path=ppt/slides/slide13.xml><?xml version="1.0" encoding="utf-8"?>
+<file path=ppt/slides/slide14.xml><?xml version="1.0" encoding="utf-8"?>
 <p:sld xmlns:a="http://schemas.openxmlformats.org/drawingml/2006/main" xmlns:r="http://schemas.openxmlformats.org/officeDocument/2006/relationships" xmlns:p="http://schemas.openxmlformats.org/presentationml/2006/main">
   <p:cSld name="Slide 12">
     <p:spTree>
@@ -6460,6 +7717,13 @@
             </a:outerShdw>
           </a:effectLst>
         </p:spPr>
+        <p:txBody>
+          <a:bodyPr/>
+          <a:lstStyle/>
+          <a:p>
+            <a:endParaRPr lang="en-US"/>
+          </a:p>
+        </p:txBody>
       </p:sp>
       <p:sp>
         <p:nvSpPr>
@@ -6671,6 +7935,13 @@
             <a:prstDash val="solid"/>
           </a:ln>
         </p:spPr>
+        <p:txBody>
+          <a:bodyPr/>
+          <a:lstStyle/>
+          <a:p>
+            <a:endParaRPr lang="en-US"/>
+          </a:p>
+        </p:txBody>
       </p:sp>
       <p:sp>
         <p:nvSpPr>
@@ -6808,6 +8079,13 @@
             <a:prstDash val="solid"/>
           </a:ln>
         </p:spPr>
+        <p:txBody>
+          <a:bodyPr/>
+          <a:lstStyle/>
+          <a:p>
+            <a:endParaRPr lang="en-US"/>
+          </a:p>
+        </p:txBody>
       </p:sp>
       <p:sp>
         <p:nvSpPr>
@@ -6945,6 +8223,13 @@
             <a:prstDash val="solid"/>
           </a:ln>
         </p:spPr>
+        <p:txBody>
+          <a:bodyPr/>
+          <a:lstStyle/>
+          <a:p>
+            <a:endParaRPr lang="en-US"/>
+          </a:p>
+        </p:txBody>
       </p:sp>
       <p:sp>
         <p:nvSpPr>
@@ -7082,6 +8367,13 @@
             <a:prstDash val="solid"/>
           </a:ln>
         </p:spPr>
+        <p:txBody>
+          <a:bodyPr/>
+          <a:lstStyle/>
+          <a:p>
+            <a:endParaRPr lang="en-US"/>
+          </a:p>
+        </p:txBody>
       </p:sp>
       <p:sp>
         <p:nvSpPr>
@@ -7211,7 +8503,7 @@
           </a:prstGeom>
           <a:extLst>
             <a:ext uri="{C572A759-6A51-4108-AA02-DFA0A04FC94B}">
-              <ma14:wrappingTextBoxFlag xmlns="" xmlns:ma14="http://schemas.microsoft.com/office/mac/drawingml/2011/main" val="0"/>
+              <ma14:wrappingTextBoxFlag xmlns:ma14="http://schemas.microsoft.com/office/mac/drawingml/2011/main" xmlns="" val="0"/>
             </a:ext>
           </a:extLst>
         </p:spPr>
@@ -7233,7 +8525,7 @@
             <a:pPr algn="l"/>
             <a:fld id="{F7021451-1387-4CA6-816F-3879F97B5CBC}" type="slidenum">
               <a:rPr lang="en-US" b="0"/>
-              <a:t>13</a:t>
+              <a:t>14</a:t>
             </a:fld>
             <a:endParaRPr lang="en-US"/>
           </a:p>
@@ -7247,7 +8539,7 @@
 </p:sld>
 </file>
 
-<file path=ppt/slides/slide14.xml><?xml version="1.0" encoding="utf-8"?>
+<file path=ppt/slides/slide15.xml><?xml version="1.0" encoding="utf-8"?>
 <p:sld xmlns:a="http://schemas.openxmlformats.org/drawingml/2006/main" xmlns:r="http://schemas.openxmlformats.org/officeDocument/2006/relationships" xmlns:p="http://schemas.openxmlformats.org/presentationml/2006/main">
   <p:cSld name="Slide 13">
     <p:bg>
@@ -7296,6 +8588,13 @@
             <a:prstDash val="solid"/>
           </a:ln>
         </p:spPr>
+        <p:txBody>
+          <a:bodyPr/>
+          <a:lstStyle/>
+          <a:p>
+            <a:endParaRPr lang="en-US"/>
+          </a:p>
+        </p:txBody>
       </p:sp>
       <p:sp>
         <p:nvSpPr>
@@ -7449,6 +8748,13 @@
             <a:prstDash val="solid"/>
           </a:ln>
         </p:spPr>
+        <p:txBody>
+          <a:bodyPr/>
+          <a:lstStyle/>
+          <a:p>
+            <a:endParaRPr lang="en-US"/>
+          </a:p>
+        </p:txBody>
       </p:sp>
       <p:sp>
         <p:nvSpPr>
@@ -7550,6 +8856,13 @@
             <a:prstDash val="solid"/>
           </a:ln>
         </p:spPr>
+        <p:txBody>
+          <a:bodyPr/>
+          <a:lstStyle/>
+          <a:p>
+            <a:endParaRPr lang="en-US"/>
+          </a:p>
+        </p:txBody>
       </p:sp>
       <p:sp>
         <p:nvSpPr>
@@ -7651,6 +8964,13 @@
             <a:prstDash val="solid"/>
           </a:ln>
         </p:spPr>
+        <p:txBody>
+          <a:bodyPr/>
+          <a:lstStyle/>
+          <a:p>
+            <a:endParaRPr lang="en-US"/>
+          </a:p>
+        </p:txBody>
       </p:sp>
       <p:sp>
         <p:nvSpPr>
@@ -7824,6 +9144,13 @@
             <a:prstDash val="solid"/>
           </a:ln>
         </p:spPr>
+        <p:txBody>
+          <a:bodyPr/>
+          <a:lstStyle/>
+          <a:p>
+            <a:endParaRPr lang="en-US"/>
+          </a:p>
+        </p:txBody>
       </p:sp>
       <p:sp>
         <p:nvSpPr>
@@ -7858,6 +9185,13 @@
             </a:outerShdw>
           </a:effectLst>
         </p:spPr>
+        <p:txBody>
+          <a:bodyPr/>
+          <a:lstStyle/>
+          <a:p>
+            <a:endParaRPr lang="en-US"/>
+          </a:p>
+        </p:txBody>
       </p:sp>
       <p:sp>
         <p:nvSpPr>
@@ -7883,6 +9217,13 @@
             <a:prstDash val="solid"/>
           </a:ln>
         </p:spPr>
+        <p:txBody>
+          <a:bodyPr/>
+          <a:lstStyle/>
+          <a:p>
+            <a:endParaRPr lang="en-US"/>
+          </a:p>
+        </p:txBody>
       </p:sp>
       <p:sp>
         <p:nvSpPr>
@@ -7908,6 +9249,13 @@
             <a:prstDash val="solid"/>
           </a:ln>
         </p:spPr>
+        <p:txBody>
+          <a:bodyPr/>
+          <a:lstStyle/>
+          <a:p>
+            <a:endParaRPr lang="en-US"/>
+          </a:p>
+        </p:txBody>
       </p:sp>
       <p:sp>
         <p:nvSpPr>
@@ -7933,6 +9281,13 @@
             <a:prstDash val="solid"/>
           </a:ln>
         </p:spPr>
+        <p:txBody>
+          <a:bodyPr/>
+          <a:lstStyle/>
+          <a:p>
+            <a:endParaRPr lang="en-US"/>
+          </a:p>
+        </p:txBody>
       </p:sp>
       <p:sp>
         <p:nvSpPr>
@@ -7958,6 +9313,13 @@
             <a:prstDash val="solid"/>
           </a:ln>
         </p:spPr>
+        <p:txBody>
+          <a:bodyPr/>
+          <a:lstStyle/>
+          <a:p>
+            <a:endParaRPr lang="en-US"/>
+          </a:p>
+        </p:txBody>
       </p:sp>
       <p:pic>
         <p:nvPicPr>
@@ -8039,7 +9401,7 @@
           </a:prstGeom>
           <a:extLst>
             <a:ext uri="{C572A759-6A51-4108-AA02-DFA0A04FC94B}">
-              <ma14:wrappingTextBoxFlag xmlns="" xmlns:ma14="http://schemas.microsoft.com/office/mac/drawingml/2011/main" val="0"/>
+              <ma14:wrappingTextBoxFlag xmlns:ma14="http://schemas.microsoft.com/office/mac/drawingml/2011/main" xmlns="" val="0"/>
             </a:ext>
           </a:extLst>
         </p:spPr>
@@ -8061,7 +9423,7 @@
             <a:pPr algn="l"/>
             <a:fld id="{F7021451-1387-4CA6-816F-3879F97B5CBC}" type="slidenum">
               <a:rPr lang="en-US" b="0"/>
-              <a:t>14</a:t>
+              <a:t>15</a:t>
             </a:fld>
             <a:endParaRPr lang="en-US"/>
           </a:p>
@@ -8230,6 +9592,13 @@
             <a:prstDash val="solid"/>
           </a:ln>
         </p:spPr>
+        <p:txBody>
+          <a:bodyPr/>
+          <a:lstStyle/>
+          <a:p>
+            <a:endParaRPr lang="en-US"/>
+          </a:p>
+        </p:txBody>
       </p:sp>
       <p:sp>
         <p:nvSpPr>
@@ -8257,6 +9626,13 @@
             <a:prstDash val="solid"/>
           </a:ln>
         </p:spPr>
+        <p:txBody>
+          <a:bodyPr/>
+          <a:lstStyle/>
+          <a:p>
+            <a:endParaRPr lang="en-US"/>
+          </a:p>
+        </p:txBody>
       </p:sp>
       <p:sp>
         <p:nvSpPr>
@@ -8394,6 +9770,13 @@
             <a:tailEnd type="triangle"/>
           </a:ln>
         </p:spPr>
+        <p:txBody>
+          <a:bodyPr/>
+          <a:lstStyle/>
+          <a:p>
+            <a:endParaRPr lang="en-US"/>
+          </a:p>
+        </p:txBody>
       </p:sp>
       <p:sp>
         <p:nvSpPr>
@@ -8421,6 +9804,13 @@
             <a:prstDash val="solid"/>
           </a:ln>
         </p:spPr>
+        <p:txBody>
+          <a:bodyPr/>
+          <a:lstStyle/>
+          <a:p>
+            <a:endParaRPr lang="en-US"/>
+          </a:p>
+        </p:txBody>
       </p:sp>
       <p:sp>
         <p:nvSpPr>
@@ -8448,6 +9838,13 @@
             <a:prstDash val="solid"/>
           </a:ln>
         </p:spPr>
+        <p:txBody>
+          <a:bodyPr/>
+          <a:lstStyle/>
+          <a:p>
+            <a:endParaRPr lang="en-US"/>
+          </a:p>
+        </p:txBody>
       </p:sp>
       <p:sp>
         <p:nvSpPr>
@@ -8585,6 +9982,13 @@
             <a:tailEnd type="triangle"/>
           </a:ln>
         </p:spPr>
+        <p:txBody>
+          <a:bodyPr/>
+          <a:lstStyle/>
+          <a:p>
+            <a:endParaRPr lang="en-US"/>
+          </a:p>
+        </p:txBody>
       </p:sp>
       <p:sp>
         <p:nvSpPr>
@@ -8612,6 +10016,13 @@
             <a:prstDash val="solid"/>
           </a:ln>
         </p:spPr>
+        <p:txBody>
+          <a:bodyPr/>
+          <a:lstStyle/>
+          <a:p>
+            <a:endParaRPr lang="en-US"/>
+          </a:p>
+        </p:txBody>
       </p:sp>
       <p:sp>
         <p:nvSpPr>
@@ -8639,6 +10050,13 @@
             <a:prstDash val="solid"/>
           </a:ln>
         </p:spPr>
+        <p:txBody>
+          <a:bodyPr/>
+          <a:lstStyle/>
+          <a:p>
+            <a:endParaRPr lang="en-US"/>
+          </a:p>
+        </p:txBody>
       </p:sp>
       <p:sp>
         <p:nvSpPr>
@@ -8886,6 +10304,13 @@
             <a:prstDash val="solid"/>
           </a:ln>
         </p:spPr>
+        <p:txBody>
+          <a:bodyPr/>
+          <a:lstStyle/>
+          <a:p>
+            <a:endParaRPr lang="en-US"/>
+          </a:p>
+        </p:txBody>
       </p:sp>
       <p:sp>
         <p:nvSpPr>
@@ -8981,7 +10406,7 @@
           </a:prstGeom>
           <a:extLst>
             <a:ext uri="{C572A759-6A51-4108-AA02-DFA0A04FC94B}">
-              <ma14:wrappingTextBoxFlag xmlns="" xmlns:ma14="http://schemas.microsoft.com/office/mac/drawingml/2011/main" val="0"/>
+              <ma14:wrappingTextBoxFlag xmlns:ma14="http://schemas.microsoft.com/office/mac/drawingml/2011/main" xmlns="" val="0"/>
             </a:ext>
           </a:extLst>
         </p:spPr>
@@ -9179,6 +10604,13 @@
             </a:outerShdw>
           </a:effectLst>
         </p:spPr>
+        <p:txBody>
+          <a:bodyPr/>
+          <a:lstStyle/>
+          <a:p>
+            <a:endParaRPr lang="en-US"/>
+          </a:p>
+        </p:txBody>
       </p:sp>
       <p:sp>
         <p:nvSpPr>
@@ -9206,6 +10638,13 @@
             <a:prstDash val="solid"/>
           </a:ln>
         </p:spPr>
+        <p:txBody>
+          <a:bodyPr/>
+          <a:lstStyle/>
+          <a:p>
+            <a:endParaRPr lang="en-US"/>
+          </a:p>
+        </p:txBody>
       </p:sp>
       <p:sp>
         <p:nvSpPr>
@@ -9609,6 +11048,13 @@
             <a:prstDash val="solid"/>
           </a:ln>
         </p:spPr>
+        <p:txBody>
+          <a:bodyPr/>
+          <a:lstStyle/>
+          <a:p>
+            <a:endParaRPr lang="en-US"/>
+          </a:p>
+        </p:txBody>
       </p:sp>
       <p:sp>
         <p:nvSpPr>
@@ -9636,6 +11082,13 @@
             <a:prstDash val="solid"/>
           </a:ln>
         </p:spPr>
+        <p:txBody>
+          <a:bodyPr/>
+          <a:lstStyle/>
+          <a:p>
+            <a:endParaRPr lang="en-US"/>
+          </a:p>
+        </p:txBody>
       </p:sp>
       <p:sp>
         <p:nvSpPr>
@@ -9767,6 +11220,13 @@
             <a:prstDash val="solid"/>
           </a:ln>
         </p:spPr>
+        <p:txBody>
+          <a:bodyPr/>
+          <a:lstStyle/>
+          <a:p>
+            <a:endParaRPr lang="en-US"/>
+          </a:p>
+        </p:txBody>
       </p:sp>
       <p:sp>
         <p:nvSpPr>
@@ -9875,6 +11335,13 @@
             </a:outerShdw>
           </a:effectLst>
         </p:spPr>
+        <p:txBody>
+          <a:bodyPr/>
+          <a:lstStyle/>
+          <a:p>
+            <a:endParaRPr lang="en-US"/>
+          </a:p>
+        </p:txBody>
       </p:sp>
       <p:sp>
         <p:nvSpPr>
@@ -9902,6 +11369,13 @@
             <a:prstDash val="solid"/>
           </a:ln>
         </p:spPr>
+        <p:txBody>
+          <a:bodyPr/>
+          <a:lstStyle/>
+          <a:p>
+            <a:endParaRPr lang="en-US"/>
+          </a:p>
+        </p:txBody>
       </p:sp>
       <p:sp>
         <p:nvSpPr>
@@ -10035,6 +11509,13 @@
             <a:prstDash val="solid"/>
           </a:ln>
         </p:spPr>
+        <p:txBody>
+          <a:bodyPr/>
+          <a:lstStyle/>
+          <a:p>
+            <a:endParaRPr lang="en-US"/>
+          </a:p>
+        </p:txBody>
       </p:sp>
       <p:sp>
         <p:nvSpPr>
@@ -10096,6 +11577,13 @@
             <a:prstDash val="solid"/>
           </a:ln>
         </p:spPr>
+        <p:txBody>
+          <a:bodyPr/>
+          <a:lstStyle/>
+          <a:p>
+            <a:endParaRPr lang="en-US"/>
+          </a:p>
+        </p:txBody>
       </p:sp>
       <p:sp>
         <p:nvSpPr>
@@ -10157,6 +11645,13 @@
             <a:prstDash val="solid"/>
           </a:ln>
         </p:spPr>
+        <p:txBody>
+          <a:bodyPr/>
+          <a:lstStyle/>
+          <a:p>
+            <a:endParaRPr lang="en-US"/>
+          </a:p>
+        </p:txBody>
       </p:sp>
       <p:sp>
         <p:nvSpPr>
@@ -10250,7 +11745,7 @@
           </a:prstGeom>
           <a:extLst>
             <a:ext uri="{C572A759-6A51-4108-AA02-DFA0A04FC94B}">
-              <ma14:wrappingTextBoxFlag xmlns="" xmlns:ma14="http://schemas.microsoft.com/office/mac/drawingml/2011/main" val="0"/>
+              <ma14:wrappingTextBoxFlag xmlns:ma14="http://schemas.microsoft.com/office/mac/drawingml/2011/main" xmlns="" val="0"/>
             </a:ext>
           </a:extLst>
         </p:spPr>
@@ -10441,6 +11936,13 @@
             <a:prstDash val="solid"/>
           </a:ln>
         </p:spPr>
+        <p:txBody>
+          <a:bodyPr/>
+          <a:lstStyle/>
+          <a:p>
+            <a:endParaRPr lang="en-US"/>
+          </a:p>
+        </p:txBody>
       </p:sp>
       <p:sp>
         <p:nvSpPr>
@@ -10580,6 +12082,13 @@
             <a:prstDash val="solid"/>
           </a:ln>
         </p:spPr>
+        <p:txBody>
+          <a:bodyPr/>
+          <a:lstStyle/>
+          <a:p>
+            <a:endParaRPr lang="en-US"/>
+          </a:p>
+        </p:txBody>
       </p:sp>
       <p:sp>
         <p:nvSpPr>
@@ -10719,6 +12228,13 @@
             <a:prstDash val="solid"/>
           </a:ln>
         </p:spPr>
+        <p:txBody>
+          <a:bodyPr/>
+          <a:lstStyle/>
+          <a:p>
+            <a:endParaRPr lang="en-US"/>
+          </a:p>
+        </p:txBody>
       </p:sp>
       <p:sp>
         <p:nvSpPr>
@@ -10858,6 +12374,13 @@
             <a:prstDash val="solid"/>
           </a:ln>
         </p:spPr>
+        <p:txBody>
+          <a:bodyPr/>
+          <a:lstStyle/>
+          <a:p>
+            <a:endParaRPr lang="en-US"/>
+          </a:p>
+        </p:txBody>
       </p:sp>
       <p:sp>
         <p:nvSpPr>
@@ -10989,7 +12512,7 @@
           </a:prstGeom>
           <a:extLst>
             <a:ext uri="{C572A759-6A51-4108-AA02-DFA0A04FC94B}">
-              <ma14:wrappingTextBoxFlag xmlns="" xmlns:ma14="http://schemas.microsoft.com/office/mac/drawingml/2011/main" val="0"/>
+              <ma14:wrappingTextBoxFlag xmlns:ma14="http://schemas.microsoft.com/office/mac/drawingml/2011/main" xmlns="" val="0"/>
             </a:ext>
           </a:extLst>
         </p:spPr>
@@ -11187,6 +12710,13 @@
             </a:outerShdw>
           </a:effectLst>
         </p:spPr>
+        <p:txBody>
+          <a:bodyPr/>
+          <a:lstStyle/>
+          <a:p>
+            <a:endParaRPr lang="en-US"/>
+          </a:p>
+        </p:txBody>
       </p:sp>
       <p:sp>
         <p:nvSpPr>
@@ -11333,6 +12863,13 @@
             </a:outerShdw>
           </a:effectLst>
         </p:spPr>
+        <p:txBody>
+          <a:bodyPr/>
+          <a:lstStyle/>
+          <a:p>
+            <a:endParaRPr lang="en-US"/>
+          </a:p>
+        </p:txBody>
       </p:sp>
       <p:sp>
         <p:nvSpPr>
@@ -11470,6 +13007,13 @@
             <a:tailEnd type="triangle"/>
           </a:ln>
         </p:spPr>
+        <p:txBody>
+          <a:bodyPr/>
+          <a:lstStyle/>
+          <a:p>
+            <a:endParaRPr lang="en-US"/>
+          </a:p>
+        </p:txBody>
       </p:sp>
       <p:sp>
         <p:nvSpPr>
@@ -11497,6 +13041,13 @@
             <a:prstDash val="solid"/>
           </a:ln>
         </p:spPr>
+        <p:txBody>
+          <a:bodyPr/>
+          <a:lstStyle/>
+          <a:p>
+            <a:endParaRPr lang="en-US"/>
+          </a:p>
+        </p:txBody>
       </p:sp>
       <p:sp>
         <p:nvSpPr>
@@ -11590,7 +13141,7 @@
           </a:prstGeom>
           <a:extLst>
             <a:ext uri="{C572A759-6A51-4108-AA02-DFA0A04FC94B}">
-              <ma14:wrappingTextBoxFlag xmlns="" xmlns:ma14="http://schemas.microsoft.com/office/mac/drawingml/2011/main" val="0"/>
+              <ma14:wrappingTextBoxFlag xmlns:ma14="http://schemas.microsoft.com/office/mac/drawingml/2011/main" xmlns="" val="0"/>
             </a:ext>
           </a:extLst>
         </p:spPr>
@@ -11716,6 +13267,13 @@
               <a:prstDash val="solid"/>
             </a:ln>
           </p:spPr>
+          <p:txBody>
+            <a:bodyPr/>
+            <a:lstStyle/>
+            <a:p>
+              <a:endParaRPr lang="en-US"/>
+            </a:p>
+          </p:txBody>
         </p:sp>
         <p:sp>
           <p:nvSpPr>
@@ -11741,6 +13299,13 @@
               <a:prstDash val="solid"/>
             </a:ln>
           </p:spPr>
+          <p:txBody>
+            <a:bodyPr/>
+            <a:lstStyle/>
+            <a:p>
+              <a:endParaRPr lang="en-US"/>
+            </a:p>
+          </p:txBody>
         </p:sp>
         <p:sp>
           <p:nvSpPr>
@@ -11766,6 +13331,13 @@
               <a:prstDash val="solid"/>
             </a:ln>
           </p:spPr>
+          <p:txBody>
+            <a:bodyPr/>
+            <a:lstStyle/>
+            <a:p>
+              <a:endParaRPr lang="en-US"/>
+            </a:p>
+          </p:txBody>
         </p:sp>
         <p:pic>
           <p:nvPicPr>
@@ -11890,6 +13462,13 @@
               <a:prstDash val="solid"/>
             </a:ln>
           </p:spPr>
+          <p:txBody>
+            <a:bodyPr/>
+            <a:lstStyle/>
+            <a:p>
+              <a:endParaRPr lang="en-US"/>
+            </a:p>
+          </p:txBody>
         </p:sp>
         <p:sp>
           <p:nvSpPr>
@@ -11915,6 +13494,13 @@
               <a:prstDash val="solid"/>
             </a:ln>
           </p:spPr>
+          <p:txBody>
+            <a:bodyPr/>
+            <a:lstStyle/>
+            <a:p>
+              <a:endParaRPr lang="en-US"/>
+            </a:p>
+          </p:txBody>
         </p:sp>
         <p:sp>
           <p:nvSpPr>
@@ -11940,6 +13526,13 @@
               <a:prstDash val="solid"/>
             </a:ln>
           </p:spPr>
+          <p:txBody>
+            <a:bodyPr/>
+            <a:lstStyle/>
+            <a:p>
+              <a:endParaRPr lang="en-US"/>
+            </a:p>
+          </p:txBody>
         </p:sp>
         <p:pic>
           <p:nvPicPr>
@@ -12129,6 +13722,13 @@
             <a:prstDash val="solid"/>
           </a:ln>
         </p:spPr>
+        <p:txBody>
+          <a:bodyPr/>
+          <a:lstStyle/>
+          <a:p>
+            <a:endParaRPr lang="en-US"/>
+          </a:p>
+        </p:txBody>
       </p:sp>
       <p:sp>
         <p:nvSpPr>
@@ -12230,6 +13830,13 @@
             <a:prstDash val="solid"/>
           </a:ln>
         </p:spPr>
+        <p:txBody>
+          <a:bodyPr/>
+          <a:lstStyle/>
+          <a:p>
+            <a:endParaRPr lang="en-US"/>
+          </a:p>
+        </p:txBody>
       </p:sp>
       <p:sp>
         <p:nvSpPr>
@@ -12331,6 +13938,13 @@
             <a:prstDash val="solid"/>
           </a:ln>
         </p:spPr>
+        <p:txBody>
+          <a:bodyPr/>
+          <a:lstStyle/>
+          <a:p>
+            <a:endParaRPr lang="en-US"/>
+          </a:p>
+        </p:txBody>
       </p:sp>
       <p:sp>
         <p:nvSpPr>
@@ -12432,6 +14046,13 @@
             <a:prstDash val="solid"/>
           </a:ln>
         </p:spPr>
+        <p:txBody>
+          <a:bodyPr/>
+          <a:lstStyle/>
+          <a:p>
+            <a:endParaRPr lang="en-US"/>
+          </a:p>
+        </p:txBody>
       </p:sp>
       <p:sp>
         <p:nvSpPr>
@@ -12567,6 +14188,13 @@
             <a:prstDash val="solid"/>
           </a:ln>
         </p:spPr>
+        <p:txBody>
+          <a:bodyPr/>
+          <a:lstStyle/>
+          <a:p>
+            <a:endParaRPr lang="en-US"/>
+          </a:p>
+        </p:txBody>
       </p:sp>
       <p:sp>
         <p:nvSpPr>
@@ -12666,6 +14294,13 @@
             <a:prstDash val="solid"/>
           </a:ln>
         </p:spPr>
+        <p:txBody>
+          <a:bodyPr/>
+          <a:lstStyle/>
+          <a:p>
+            <a:endParaRPr lang="en-US"/>
+          </a:p>
+        </p:txBody>
       </p:sp>
       <p:sp>
         <p:nvSpPr>
@@ -12765,6 +14400,13 @@
             <a:prstDash val="solid"/>
           </a:ln>
         </p:spPr>
+        <p:txBody>
+          <a:bodyPr/>
+          <a:lstStyle/>
+          <a:p>
+            <a:endParaRPr lang="en-US"/>
+          </a:p>
+        </p:txBody>
       </p:sp>
       <p:sp>
         <p:nvSpPr>
@@ -12864,6 +14506,13 @@
             <a:prstDash val="solid"/>
           </a:ln>
         </p:spPr>
+        <p:txBody>
+          <a:bodyPr/>
+          <a:lstStyle/>
+          <a:p>
+            <a:endParaRPr lang="en-US"/>
+          </a:p>
+        </p:txBody>
       </p:sp>
       <p:sp>
         <p:nvSpPr>
@@ -12963,6 +14612,13 @@
             <a:prstDash val="solid"/>
           </a:ln>
         </p:spPr>
+        <p:txBody>
+          <a:bodyPr/>
+          <a:lstStyle/>
+          <a:p>
+            <a:endParaRPr lang="en-US"/>
+          </a:p>
+        </p:txBody>
       </p:sp>
       <p:sp>
         <p:nvSpPr>
@@ -13064,6 +14720,13 @@
             <a:prstDash val="solid"/>
           </a:ln>
         </p:spPr>
+        <p:txBody>
+          <a:bodyPr/>
+          <a:lstStyle/>
+          <a:p>
+            <a:endParaRPr lang="en-US"/>
+          </a:p>
+        </p:txBody>
       </p:sp>
       <p:sp>
         <p:nvSpPr>
@@ -13195,7 +14858,7 @@
           </a:prstGeom>
           <a:extLst>
             <a:ext uri="{C572A759-6A51-4108-AA02-DFA0A04FC94B}">
-              <ma14:wrappingTextBoxFlag xmlns="" xmlns:ma14="http://schemas.microsoft.com/office/mac/drawingml/2011/main" val="0"/>
+              <ma14:wrappingTextBoxFlag xmlns:ma14="http://schemas.microsoft.com/office/mac/drawingml/2011/main" xmlns="" val="0"/>
             </a:ext>
           </a:extLst>
         </p:spPr>
@@ -13386,6 +15049,13 @@
             <a:prstDash val="solid"/>
           </a:ln>
         </p:spPr>
+        <p:txBody>
+          <a:bodyPr/>
+          <a:lstStyle/>
+          <a:p>
+            <a:endParaRPr lang="en-US"/>
+          </a:p>
+        </p:txBody>
       </p:sp>
       <p:sp>
         <p:nvSpPr>
@@ -13413,6 +15083,13 @@
             <a:prstDash val="solid"/>
           </a:ln>
         </p:spPr>
+        <p:txBody>
+          <a:bodyPr/>
+          <a:lstStyle/>
+          <a:p>
+            <a:endParaRPr lang="en-US"/>
+          </a:p>
+        </p:txBody>
       </p:sp>
       <p:sp>
         <p:nvSpPr>
@@ -13578,6 +15255,13 @@
             <a:prstDash val="solid"/>
           </a:ln>
         </p:spPr>
+        <p:txBody>
+          <a:bodyPr/>
+          <a:lstStyle/>
+          <a:p>
+            <a:endParaRPr lang="en-US"/>
+          </a:p>
+        </p:txBody>
       </p:sp>
       <p:sp>
         <p:nvSpPr>
@@ -13605,6 +15289,13 @@
             <a:prstDash val="solid"/>
           </a:ln>
         </p:spPr>
+        <p:txBody>
+          <a:bodyPr/>
+          <a:lstStyle/>
+          <a:p>
+            <a:endParaRPr lang="en-US"/>
+          </a:p>
+        </p:txBody>
       </p:sp>
       <p:sp>
         <p:nvSpPr>
@@ -13770,6 +15461,13 @@
             <a:prstDash val="solid"/>
           </a:ln>
         </p:spPr>
+        <p:txBody>
+          <a:bodyPr/>
+          <a:lstStyle/>
+          <a:p>
+            <a:endParaRPr lang="en-US"/>
+          </a:p>
+        </p:txBody>
       </p:sp>
       <p:sp>
         <p:nvSpPr>
@@ -13797,6 +15495,13 @@
             <a:prstDash val="solid"/>
           </a:ln>
         </p:spPr>
+        <p:txBody>
+          <a:bodyPr/>
+          <a:lstStyle/>
+          <a:p>
+            <a:endParaRPr lang="en-US"/>
+          </a:p>
+        </p:txBody>
       </p:sp>
       <p:sp>
         <p:nvSpPr>
@@ -13962,6 +15667,13 @@
             <a:prstDash val="solid"/>
           </a:ln>
         </p:spPr>
+        <p:txBody>
+          <a:bodyPr/>
+          <a:lstStyle/>
+          <a:p>
+            <a:endParaRPr lang="en-US"/>
+          </a:p>
+        </p:txBody>
       </p:sp>
       <p:sp>
         <p:nvSpPr>
@@ -13989,6 +15701,13 @@
             <a:prstDash val="solid"/>
           </a:ln>
         </p:spPr>
+        <p:txBody>
+          <a:bodyPr/>
+          <a:lstStyle/>
+          <a:p>
+            <a:endParaRPr lang="en-US"/>
+          </a:p>
+        </p:txBody>
       </p:sp>
       <p:sp>
         <p:nvSpPr>
@@ -14154,6 +15873,13 @@
             <a:prstDash val="solid"/>
           </a:ln>
         </p:spPr>
+        <p:txBody>
+          <a:bodyPr/>
+          <a:lstStyle/>
+          <a:p>
+            <a:endParaRPr lang="en-US"/>
+          </a:p>
+        </p:txBody>
       </p:sp>
       <p:sp>
         <p:nvSpPr>
@@ -14181,6 +15907,13 @@
             <a:prstDash val="solid"/>
           </a:ln>
         </p:spPr>
+        <p:txBody>
+          <a:bodyPr/>
+          <a:lstStyle/>
+          <a:p>
+            <a:endParaRPr lang="en-US"/>
+          </a:p>
+        </p:txBody>
       </p:sp>
       <p:sp>
         <p:nvSpPr>
@@ -14310,6 +16043,13 @@
             <a:prstDash val="solid"/>
           </a:ln>
         </p:spPr>
+        <p:txBody>
+          <a:bodyPr/>
+          <a:lstStyle/>
+          <a:p>
+            <a:endParaRPr lang="en-US"/>
+          </a:p>
+        </p:txBody>
       </p:sp>
       <p:sp>
         <p:nvSpPr>
@@ -14447,6 +16187,13 @@
             <a:prstDash val="solid"/>
           </a:ln>
         </p:spPr>
+        <p:txBody>
+          <a:bodyPr/>
+          <a:lstStyle/>
+          <a:p>
+            <a:endParaRPr lang="en-US"/>
+          </a:p>
+        </p:txBody>
       </p:sp>
       <p:sp>
         <p:nvSpPr>
@@ -14584,6 +16331,13 @@
             <a:prstDash val="solid"/>
           </a:ln>
         </p:spPr>
+        <p:txBody>
+          <a:bodyPr/>
+          <a:lstStyle/>
+          <a:p>
+            <a:endParaRPr lang="en-US"/>
+          </a:p>
+        </p:txBody>
       </p:sp>
       <p:sp>
         <p:nvSpPr>
@@ -14721,6 +16475,13 @@
             <a:prstDash val="solid"/>
           </a:ln>
         </p:spPr>
+        <p:txBody>
+          <a:bodyPr/>
+          <a:lstStyle/>
+          <a:p>
+            <a:endParaRPr lang="en-US"/>
+          </a:p>
+        </p:txBody>
       </p:sp>
       <p:sp>
         <p:nvSpPr>
@@ -14852,7 +16613,7 @@
           </a:prstGeom>
           <a:extLst>
             <a:ext uri="{C572A759-6A51-4108-AA02-DFA0A04FC94B}">
-              <ma14:wrappingTextBoxFlag xmlns="" xmlns:ma14="http://schemas.microsoft.com/office/mac/drawingml/2011/main" val="0"/>
+              <ma14:wrappingTextBoxFlag xmlns:ma14="http://schemas.microsoft.com/office/mac/drawingml/2011/main" xmlns="" val="0"/>
             </a:ext>
           </a:extLst>
         </p:spPr>
@@ -15024,7 +16785,7 @@
           </a:prstGeom>
           <a:extLst>
             <a:ext uri="{C572A759-6A51-4108-AA02-DFA0A04FC94B}">
-              <ma14:wrappingTextBoxFlag xmlns="" xmlns:ma14="http://schemas.microsoft.com/office/mac/drawingml/2011/main" val="0"/>
+              <ma14:wrappingTextBoxFlag xmlns:ma14="http://schemas.microsoft.com/office/mac/drawingml/2011/main" xmlns="" val="0"/>
             </a:ext>
           </a:extLst>
         </p:spPr>
@@ -16426,6 +18187,13 @@
             <a:prstDash val="solid"/>
           </a:ln>
         </p:spPr>
+        <p:txBody>
+          <a:bodyPr/>
+          <a:lstStyle/>
+          <a:p>
+            <a:endParaRPr lang="en-US"/>
+          </a:p>
+        </p:txBody>
       </p:sp>
       <p:sp>
         <p:nvSpPr>
@@ -16487,6 +18255,13 @@
             <a:prstDash val="solid"/>
           </a:ln>
         </p:spPr>
+        <p:txBody>
+          <a:bodyPr/>
+          <a:lstStyle/>
+          <a:p>
+            <a:endParaRPr lang="en-US"/>
+          </a:p>
+        </p:txBody>
       </p:sp>
       <p:sp>
         <p:nvSpPr>
@@ -16548,6 +18323,13 @@
             <a:prstDash val="solid"/>
           </a:ln>
         </p:spPr>
+        <p:txBody>
+          <a:bodyPr/>
+          <a:lstStyle/>
+          <a:p>
+            <a:endParaRPr lang="en-US"/>
+          </a:p>
+        </p:txBody>
       </p:sp>
       <p:sp>
         <p:nvSpPr>
@@ -16609,6 +18391,13 @@
             <a:prstDash val="solid"/>
           </a:ln>
         </p:spPr>
+        <p:txBody>
+          <a:bodyPr/>
+          <a:lstStyle/>
+          <a:p>
+            <a:endParaRPr lang="en-US"/>
+          </a:p>
+        </p:txBody>
       </p:sp>
       <p:sp>
         <p:nvSpPr>
@@ -16670,6 +18459,13 @@
             <a:prstDash val="solid"/>
           </a:ln>
         </p:spPr>
+        <p:txBody>
+          <a:bodyPr/>
+          <a:lstStyle/>
+          <a:p>
+            <a:endParaRPr lang="en-US"/>
+          </a:p>
+        </p:txBody>
       </p:sp>
       <p:sp>
         <p:nvSpPr>
@@ -16731,6 +18527,13 @@
             <a:prstDash val="solid"/>
           </a:ln>
         </p:spPr>
+        <p:txBody>
+          <a:bodyPr/>
+          <a:lstStyle/>
+          <a:p>
+            <a:endParaRPr lang="en-US"/>
+          </a:p>
+        </p:txBody>
       </p:sp>
       <p:sp>
         <p:nvSpPr>
@@ -16794,6 +18597,13 @@
             <a:prstDash val="solid"/>
           </a:ln>
         </p:spPr>
+        <p:txBody>
+          <a:bodyPr/>
+          <a:lstStyle/>
+          <a:p>
+            <a:endParaRPr lang="en-US"/>
+          </a:p>
+        </p:txBody>
       </p:sp>
       <p:sp>
         <p:nvSpPr>
@@ -16857,6 +18667,13 @@
             <a:prstDash val="solid"/>
           </a:ln>
         </p:spPr>
+        <p:txBody>
+          <a:bodyPr/>
+          <a:lstStyle/>
+          <a:p>
+            <a:endParaRPr lang="en-US"/>
+          </a:p>
+        </p:txBody>
       </p:sp>
       <p:sp>
         <p:nvSpPr>
@@ -16920,6 +18737,13 @@
             <a:prstDash val="solid"/>
           </a:ln>
         </p:spPr>
+        <p:txBody>
+          <a:bodyPr/>
+          <a:lstStyle/>
+          <a:p>
+            <a:endParaRPr lang="en-US"/>
+          </a:p>
+        </p:txBody>
       </p:sp>
       <p:sp>
         <p:nvSpPr>
@@ -16983,6 +18807,13 @@
             <a:prstDash val="solid"/>
           </a:ln>
         </p:spPr>
+        <p:txBody>
+          <a:bodyPr/>
+          <a:lstStyle/>
+          <a:p>
+            <a:endParaRPr lang="en-US"/>
+          </a:p>
+        </p:txBody>
       </p:sp>
       <p:sp>
         <p:nvSpPr>
@@ -17046,6 +18877,13 @@
             <a:prstDash val="solid"/>
           </a:ln>
         </p:spPr>
+        <p:txBody>
+          <a:bodyPr/>
+          <a:lstStyle/>
+          <a:p>
+            <a:endParaRPr lang="en-US"/>
+          </a:p>
+        </p:txBody>
       </p:sp>
       <p:sp>
         <p:nvSpPr>
@@ -17109,6 +18947,13 @@
             <a:prstDash val="solid"/>
           </a:ln>
         </p:spPr>
+        <p:txBody>
+          <a:bodyPr/>
+          <a:lstStyle/>
+          <a:p>
+            <a:endParaRPr lang="en-US"/>
+          </a:p>
+        </p:txBody>
       </p:sp>
       <p:sp>
         <p:nvSpPr>
@@ -17172,6 +19017,13 @@
             <a:prstDash val="solid"/>
           </a:ln>
         </p:spPr>
+        <p:txBody>
+          <a:bodyPr/>
+          <a:lstStyle/>
+          <a:p>
+            <a:endParaRPr lang="en-US"/>
+          </a:p>
+        </p:txBody>
       </p:sp>
       <p:sp>
         <p:nvSpPr>
@@ -17235,6 +19087,13 @@
             <a:prstDash val="solid"/>
           </a:ln>
         </p:spPr>
+        <p:txBody>
+          <a:bodyPr/>
+          <a:lstStyle/>
+          <a:p>
+            <a:endParaRPr lang="en-US"/>
+          </a:p>
+        </p:txBody>
       </p:sp>
       <p:sp>
         <p:nvSpPr>
@@ -17298,6 +19157,13 @@
             <a:prstDash val="solid"/>
           </a:ln>
         </p:spPr>
+        <p:txBody>
+          <a:bodyPr/>
+          <a:lstStyle/>
+          <a:p>
+            <a:endParaRPr lang="en-US"/>
+          </a:p>
+        </p:txBody>
       </p:sp>
       <p:sp>
         <p:nvSpPr>
@@ -17361,6 +19227,13 @@
             <a:prstDash val="solid"/>
           </a:ln>
         </p:spPr>
+        <p:txBody>
+          <a:bodyPr/>
+          <a:lstStyle/>
+          <a:p>
+            <a:endParaRPr lang="en-US"/>
+          </a:p>
+        </p:txBody>
       </p:sp>
       <p:sp>
         <p:nvSpPr>
@@ -17424,6 +19297,13 @@
             <a:prstDash val="solid"/>
           </a:ln>
         </p:spPr>
+        <p:txBody>
+          <a:bodyPr/>
+          <a:lstStyle/>
+          <a:p>
+            <a:endParaRPr lang="en-US"/>
+          </a:p>
+        </p:txBody>
       </p:sp>
       <p:sp>
         <p:nvSpPr>
@@ -17487,6 +19367,13 @@
             <a:prstDash val="solid"/>
           </a:ln>
         </p:spPr>
+        <p:txBody>
+          <a:bodyPr/>
+          <a:lstStyle/>
+          <a:p>
+            <a:endParaRPr lang="en-US"/>
+          </a:p>
+        </p:txBody>
       </p:sp>
       <p:sp>
         <p:nvSpPr>
@@ -17550,6 +19437,13 @@
             <a:prstDash val="solid"/>
           </a:ln>
         </p:spPr>
+        <p:txBody>
+          <a:bodyPr/>
+          <a:lstStyle/>
+          <a:p>
+            <a:endParaRPr lang="en-US"/>
+          </a:p>
+        </p:txBody>
       </p:sp>
       <p:sp>
         <p:nvSpPr>
@@ -17613,6 +19507,13 @@
             <a:prstDash val="solid"/>
           </a:ln>
         </p:spPr>
+        <p:txBody>
+          <a:bodyPr/>
+          <a:lstStyle/>
+          <a:p>
+            <a:endParaRPr lang="en-US"/>
+          </a:p>
+        </p:txBody>
       </p:sp>
       <p:sp>
         <p:nvSpPr>
@@ -17676,6 +19577,13 @@
             <a:prstDash val="solid"/>
           </a:ln>
         </p:spPr>
+        <p:txBody>
+          <a:bodyPr/>
+          <a:lstStyle/>
+          <a:p>
+            <a:endParaRPr lang="en-US"/>
+          </a:p>
+        </p:txBody>
       </p:sp>
       <p:sp>
         <p:nvSpPr>
@@ -17739,6 +19647,13 @@
             <a:prstDash val="solid"/>
           </a:ln>
         </p:spPr>
+        <p:txBody>
+          <a:bodyPr/>
+          <a:lstStyle/>
+          <a:p>
+            <a:endParaRPr lang="en-US"/>
+          </a:p>
+        </p:txBody>
       </p:sp>
       <p:sp>
         <p:nvSpPr>
@@ -17802,6 +19717,13 @@
             <a:prstDash val="solid"/>
           </a:ln>
         </p:spPr>
+        <p:txBody>
+          <a:bodyPr/>
+          <a:lstStyle/>
+          <a:p>
+            <a:endParaRPr lang="en-US"/>
+          </a:p>
+        </p:txBody>
       </p:sp>
       <p:sp>
         <p:nvSpPr>
@@ -17865,6 +19787,13 @@
             <a:prstDash val="solid"/>
           </a:ln>
         </p:spPr>
+        <p:txBody>
+          <a:bodyPr/>
+          <a:lstStyle/>
+          <a:p>
+            <a:endParaRPr lang="en-US"/>
+          </a:p>
+        </p:txBody>
       </p:sp>
       <p:sp>
         <p:nvSpPr>
@@ -17928,6 +19857,13 @@
             <a:prstDash val="solid"/>
           </a:ln>
         </p:spPr>
+        <p:txBody>
+          <a:bodyPr/>
+          <a:lstStyle/>
+          <a:p>
+            <a:endParaRPr lang="en-US"/>
+          </a:p>
+        </p:txBody>
       </p:sp>
       <p:sp>
         <p:nvSpPr>
@@ -17991,6 +19927,13 @@
             <a:prstDash val="solid"/>
           </a:ln>
         </p:spPr>
+        <p:txBody>
+          <a:bodyPr/>
+          <a:lstStyle/>
+          <a:p>
+            <a:endParaRPr lang="en-US"/>
+          </a:p>
+        </p:txBody>
       </p:sp>
       <p:sp>
         <p:nvSpPr>
@@ -18054,6 +19997,13 @@
             <a:prstDash val="solid"/>
           </a:ln>
         </p:spPr>
+        <p:txBody>
+          <a:bodyPr/>
+          <a:lstStyle/>
+          <a:p>
+            <a:endParaRPr lang="en-US"/>
+          </a:p>
+        </p:txBody>
       </p:sp>
       <p:sp>
         <p:nvSpPr>
@@ -18117,6 +20067,13 @@
             <a:prstDash val="solid"/>
           </a:ln>
         </p:spPr>
+        <p:txBody>
+          <a:bodyPr/>
+          <a:lstStyle/>
+          <a:p>
+            <a:endParaRPr lang="en-US"/>
+          </a:p>
+        </p:txBody>
       </p:sp>
       <p:sp>
         <p:nvSpPr>
@@ -18180,6 +20137,13 @@
             <a:prstDash val="solid"/>
           </a:ln>
         </p:spPr>
+        <p:txBody>
+          <a:bodyPr/>
+          <a:lstStyle/>
+          <a:p>
+            <a:endParaRPr lang="en-US"/>
+          </a:p>
+        </p:txBody>
       </p:sp>
       <p:sp>
         <p:nvSpPr>
@@ -18243,6 +20207,13 @@
             <a:prstDash val="solid"/>
           </a:ln>
         </p:spPr>
+        <p:txBody>
+          <a:bodyPr/>
+          <a:lstStyle/>
+          <a:p>
+            <a:endParaRPr lang="en-US"/>
+          </a:p>
+        </p:txBody>
       </p:sp>
       <p:sp>
         <p:nvSpPr>
@@ -18308,6 +20279,13 @@
             <a:prstDash val="solid"/>
           </a:ln>
         </p:spPr>
+        <p:txBody>
+          <a:bodyPr/>
+          <a:lstStyle/>
+          <a:p>
+            <a:endParaRPr lang="en-US"/>
+          </a:p>
+        </p:txBody>
       </p:sp>
       <p:sp>
         <p:nvSpPr>
@@ -18371,6 +20349,13 @@
             <a:prstDash val="solid"/>
           </a:ln>
         </p:spPr>
+        <p:txBody>
+          <a:bodyPr/>
+          <a:lstStyle/>
+          <a:p>
+            <a:endParaRPr lang="en-US"/>
+          </a:p>
+        </p:txBody>
       </p:sp>
       <p:sp>
         <p:nvSpPr>
@@ -18434,6 +20419,13 @@
             <a:prstDash val="solid"/>
           </a:ln>
         </p:spPr>
+        <p:txBody>
+          <a:bodyPr/>
+          <a:lstStyle/>
+          <a:p>
+            <a:endParaRPr lang="en-US"/>
+          </a:p>
+        </p:txBody>
       </p:sp>
       <p:sp>
         <p:nvSpPr>
@@ -18565,7 +20557,7 @@
           </a:prstGeom>
           <a:extLst>
             <a:ext uri="{C572A759-6A51-4108-AA02-DFA0A04FC94B}">
-              <ma14:wrappingTextBoxFlag xmlns="" xmlns:ma14="http://schemas.microsoft.com/office/mac/drawingml/2011/main" val="0"/>
+              <ma14:wrappingTextBoxFlag xmlns:ma14="http://schemas.microsoft.com/office/mac/drawingml/2011/main" xmlns="" val="0"/>
             </a:ext>
           </a:extLst>
         </p:spPr>
